--- a/documentation/AI Presentation Coach.pptx
+++ b/documentation/AI Presentation Coach.pptx
@@ -1713,7 +1713,7 @@
           </a:prstGeom>
           <a:extLst>
             <a:ext uri="{C572A759-6A51-4108-AA02-DFA0A04FC94B}">
-              <ma14:wrappingTextBoxFlag xmlns:ma14="http://schemas.microsoft.com/office/mac/drawingml/2011/main" xmlns="" val="0"/>
+              <ma14:wrappingTextBoxFlag xmlns="" xmlns:ma14="http://schemas.microsoft.com/office/mac/drawingml/2011/main" val="0"/>
             </a:ext>
           </a:extLst>
         </p:spPr>
@@ -1866,7 +1866,7 @@
           </a:prstGeom>
           <a:extLst>
             <a:ext uri="{C572A759-6A51-4108-AA02-DFA0A04FC94B}">
-              <ma14:wrappingTextBoxFlag xmlns:ma14="http://schemas.microsoft.com/office/mac/drawingml/2011/main" xmlns="" val="0"/>
+              <ma14:wrappingTextBoxFlag xmlns="" xmlns:ma14="http://schemas.microsoft.com/office/mac/drawingml/2011/main" val="0"/>
             </a:ext>
           </a:extLst>
         </p:spPr>
@@ -3518,6 +3518,45 @@
           </a:prstGeom>
         </p:spPr>
       </p:pic>
+      <p:sp>
+        <p:nvSpPr>
+          <p:cNvPr id="2" name="TextBox 1">
+            <a:extLst>
+              <a:ext uri="{FF2B5EF4-FFF2-40B4-BE49-F238E27FC236}">
+                <a16:creationId xmlns:a16="http://schemas.microsoft.com/office/drawing/2014/main" id="{CF1567BB-5F6A-1219-AC17-8085D1F35161}"/>
+              </a:ext>
+            </a:extLst>
+          </p:cNvPr>
+          <p:cNvSpPr txBox="1"/>
+          <p:nvPr/>
+        </p:nvSpPr>
+        <p:spPr>
+          <a:xfrm>
+            <a:off x="7655857" y="5567082"/>
+            <a:ext cx="4240306" cy="646331"/>
+          </a:xfrm>
+          <a:prstGeom prst="rect">
+            <a:avLst/>
+          </a:prstGeom>
+          <a:noFill/>
+        </p:spPr>
+        <p:txBody>
+          <a:bodyPr wrap="square" rtlCol="0">
+            <a:spAutoFit/>
+          </a:bodyPr>
+          <a:lstStyle/>
+          <a:p>
+            <a:r>
+              <a:rPr lang="en-US" b="1" dirty="0">
+                <a:solidFill>
+                  <a:srgbClr val="FFC000"/>
+                </a:solidFill>
+              </a:rPr>
+              <a:t>Draft: Report format will be worked on during 60 Day Path to Production.</a:t>
+            </a:r>
+          </a:p>
+        </p:txBody>
+      </p:sp>
     </p:spTree>
     <p:extLst>
       <p:ext uri="{BB962C8B-B14F-4D97-AF65-F5344CB8AC3E}">
@@ -3569,7 +3608,7 @@
         <p:spPr>
           <a:xfrm>
             <a:off x="8565005" y="2356818"/>
-            <a:ext cx="3255518" cy="1477328"/>
+            <a:ext cx="3255518" cy="1754326"/>
           </a:xfrm>
           <a:prstGeom prst="rect">
             <a:avLst/>
@@ -3588,7 +3627,23 @@
                   <a:schemeClr val="bg1"/>
                 </a:solidFill>
               </a:rPr>
-              <a:t>CICD Pipelines allow deploys at logical unit level:</a:t>
+              <a:t>CICD Pipelines pull from </a:t>
+            </a:r>
+            <a:r>
+              <a:rPr lang="en-US" dirty="0" err="1">
+                <a:solidFill>
+                  <a:schemeClr val="bg1"/>
+                </a:solidFill>
+              </a:rPr>
+              <a:t>Github</a:t>
+            </a:r>
+            <a:r>
+              <a:rPr lang="en-US" dirty="0">
+                <a:solidFill>
+                  <a:schemeClr val="bg1"/>
+                </a:solidFill>
+              </a:rPr>
+              <a:t> and allow deploys at multiple logical unit levels:</a:t>
             </a:r>
           </a:p>
           <a:p>
@@ -4637,8 +4692,8 @@
         </p:nvSpPr>
         <p:spPr>
           <a:xfrm>
-            <a:off x="1919124" y="819029"/>
-            <a:ext cx="8353825" cy="523220"/>
+            <a:off x="2046564" y="819029"/>
+            <a:ext cx="8098947" cy="523220"/>
           </a:xfrm>
           <a:prstGeom prst="rect">
             <a:avLst/>
@@ -4658,23 +4713,7 @@
                   <a:schemeClr val="bg1"/>
                 </a:solidFill>
               </a:rPr>
-              <a:t>Observability and Monitoring – (eta</a:t>
-            </a:r>
-            <a:r>
-              <a:rPr lang="en-US" sz="2800">
-                <a:solidFill>
-                  <a:schemeClr val="bg1"/>
-                </a:solidFill>
-              </a:rPr>
-              <a:t>: July 31 2026</a:t>
-            </a:r>
-            <a:r>
-              <a:rPr lang="en-US" sz="2800" dirty="0">
-                <a:solidFill>
-                  <a:schemeClr val="bg1"/>
-                </a:solidFill>
-              </a:rPr>
-              <a:t>)</a:t>
+              <a:t>Observability and Monitoring – (eta: Aug 15, 2026)</a:t>
             </a:r>
           </a:p>
         </p:txBody>
@@ -5067,7 +5106,7 @@
         <p:spPr>
           <a:xfrm>
             <a:off x="4383245" y="819029"/>
-            <a:ext cx="3425553" cy="523220"/>
+            <a:ext cx="3425553" cy="830997"/>
           </a:xfrm>
           <a:prstGeom prst="rect">
             <a:avLst/>
@@ -5096,6 +5135,17 @@
                 </a:solidFill>
               </a:rPr>
               <a:t> Repo Activity</a:t>
+            </a:r>
+          </a:p>
+          <a:p>
+            <a:pPr algn="ctr"/>
+            <a:r>
+              <a:rPr lang="en-US" sz="2000" b="1" dirty="0">
+                <a:solidFill>
+                  <a:srgbClr val="FFC000"/>
+                </a:solidFill>
+              </a:rPr>
+              <a:t>Initial Build</a:t>
             </a:r>
           </a:p>
         </p:txBody>
@@ -6008,7 +6058,7 @@
           </a:prstGeom>
           <a:extLst>
             <a:ext uri="{C572A759-6A51-4108-AA02-DFA0A04FC94B}">
-              <ma14:wrappingTextBoxFlag xmlns:ma14="http://schemas.microsoft.com/office/mac/drawingml/2011/main" xmlns="" val="0"/>
+              <ma14:wrappingTextBoxFlag xmlns="" xmlns:ma14="http://schemas.microsoft.com/office/mac/drawingml/2011/main" val="0"/>
             </a:ext>
           </a:extLst>
         </p:spPr>
@@ -25454,6 +25504,62 @@
           </a:p>
         </p:txBody>
       </p:sp>
+      <p:sp>
+        <p:nvSpPr>
+          <p:cNvPr id="24" name="TextBox 23">
+            <a:extLst>
+              <a:ext uri="{FF2B5EF4-FFF2-40B4-BE49-F238E27FC236}">
+                <a16:creationId xmlns:a16="http://schemas.microsoft.com/office/drawing/2014/main" id="{5775133E-C138-3BAA-631B-662D310C67CD}"/>
+              </a:ext>
+            </a:extLst>
+          </p:cNvPr>
+          <p:cNvSpPr txBox="1"/>
+          <p:nvPr/>
+        </p:nvSpPr>
+        <p:spPr>
+          <a:xfrm>
+            <a:off x="3601243" y="6131777"/>
+            <a:ext cx="7689028" cy="369332"/>
+          </a:xfrm>
+          <a:prstGeom prst="rect">
+            <a:avLst/>
+          </a:prstGeom>
+          <a:noFill/>
+        </p:spPr>
+        <p:txBody>
+          <a:bodyPr wrap="none" rtlCol="0">
+            <a:spAutoFit/>
+          </a:bodyPr>
+          <a:lstStyle/>
+          <a:p>
+            <a:pPr algn="ctr"/>
+            <a:r>
+              <a:rPr lang="en-US" b="1" dirty="0">
+                <a:solidFill>
+                  <a:srgbClr val="FFC000"/>
+                </a:solidFill>
+              </a:rPr>
+              <a:t>Option: Replacing </a:t>
+            </a:r>
+            <a:r>
+              <a:rPr lang="en-US" b="1" dirty="0" err="1">
+                <a:solidFill>
+                  <a:srgbClr val="FFC000"/>
+                </a:solidFill>
+              </a:rPr>
+              <a:t>EventBridge</a:t>
+            </a:r>
+            <a:r>
+              <a:rPr lang="en-US" b="1" dirty="0">
+                <a:solidFill>
+                  <a:srgbClr val="FFC000"/>
+                </a:solidFill>
+              </a:rPr>
+              <a:t> Pipes with Lambdas can be explored </a:t>
+            </a:r>
+          </a:p>
+        </p:txBody>
+      </p:sp>
     </p:spTree>
     <p:extLst>
       <p:ext uri="{BB962C8B-B14F-4D97-AF65-F5344CB8AC3E}">
@@ -26530,7 +26636,7 @@
           </a:prstGeom>
           <a:extLst>
             <a:ext uri="{C572A759-6A51-4108-AA02-DFA0A04FC94B}">
-              <ma14:wrappingTextBoxFlag xmlns:ma14="http://schemas.microsoft.com/office/mac/drawingml/2011/main" xmlns="" val="0"/>
+              <ma14:wrappingTextBoxFlag xmlns="" xmlns:ma14="http://schemas.microsoft.com/office/mac/drawingml/2011/main" val="0"/>
             </a:ext>
           </a:extLst>
         </p:spPr>
@@ -27675,7 +27781,7 @@
           </a:prstGeom>
           <a:extLst>
             <a:ext uri="{C572A759-6A51-4108-AA02-DFA0A04FC94B}">
-              <ma14:wrappingTextBoxFlag xmlns:ma14="http://schemas.microsoft.com/office/mac/drawingml/2011/main" xmlns="" val="0"/>
+              <ma14:wrappingTextBoxFlag xmlns="" xmlns:ma14="http://schemas.microsoft.com/office/mac/drawingml/2011/main" val="0"/>
             </a:ext>
           </a:extLst>
         </p:spPr>
@@ -28858,7 +28964,7 @@
           </a:prstGeom>
           <a:extLst>
             <a:ext uri="{C572A759-6A51-4108-AA02-DFA0A04FC94B}">
-              <ma14:wrappingTextBoxFlag xmlns:ma14="http://schemas.microsoft.com/office/mac/drawingml/2011/main" xmlns="" val="0"/>
+              <ma14:wrappingTextBoxFlag xmlns="" xmlns:ma14="http://schemas.microsoft.com/office/mac/drawingml/2011/main" val="0"/>
             </a:ext>
           </a:extLst>
         </p:spPr>
@@ -29613,7 +29719,7 @@
           </a:prstGeom>
           <a:extLst>
             <a:ext uri="{C572A759-6A51-4108-AA02-DFA0A04FC94B}">
-              <ma14:wrappingTextBoxFlag xmlns:ma14="http://schemas.microsoft.com/office/mac/drawingml/2011/main" xmlns="" val="0"/>
+              <ma14:wrappingTextBoxFlag xmlns="" xmlns:ma14="http://schemas.microsoft.com/office/mac/drawingml/2011/main" val="0"/>
             </a:ext>
           </a:extLst>
         </p:spPr>
@@ -30621,7 +30727,7 @@
           </a:prstGeom>
           <a:extLst>
             <a:ext uri="{C572A759-6A51-4108-AA02-DFA0A04FC94B}">
-              <ma14:wrappingTextBoxFlag xmlns:ma14="http://schemas.microsoft.com/office/mac/drawingml/2011/main" xmlns="" val="0"/>
+              <ma14:wrappingTextBoxFlag xmlns="" xmlns:ma14="http://schemas.microsoft.com/office/mac/drawingml/2011/main" val="0"/>
             </a:ext>
           </a:extLst>
         </p:spPr>
@@ -31698,7 +31804,7 @@
           </a:prstGeom>
           <a:extLst>
             <a:ext uri="{C572A759-6A51-4108-AA02-DFA0A04FC94B}">
-              <ma14:wrappingTextBoxFlag xmlns:ma14="http://schemas.microsoft.com/office/mac/drawingml/2011/main" xmlns="" val="0"/>
+              <ma14:wrappingTextBoxFlag xmlns="" xmlns:ma14="http://schemas.microsoft.com/office/mac/drawingml/2011/main" val="0"/>
             </a:ext>
           </a:extLst>
         </p:spPr>
@@ -32355,7 +32461,7 @@
           </a:prstGeom>
           <a:extLst>
             <a:ext uri="{C572A759-6A51-4108-AA02-DFA0A04FC94B}">
-              <ma14:wrappingTextBoxFlag xmlns:ma14="http://schemas.microsoft.com/office/mac/drawingml/2011/main" xmlns="" val="0"/>
+              <ma14:wrappingTextBoxFlag xmlns="" xmlns:ma14="http://schemas.microsoft.com/office/mac/drawingml/2011/main" val="0"/>
             </a:ext>
           </a:extLst>
         </p:spPr>
@@ -33236,7 +33342,7 @@
           </a:prstGeom>
           <a:extLst>
             <a:ext uri="{C572A759-6A51-4108-AA02-DFA0A04FC94B}">
-              <ma14:wrappingTextBoxFlag xmlns:ma14="http://schemas.microsoft.com/office/mac/drawingml/2011/main" xmlns="" val="0"/>
+              <ma14:wrappingTextBoxFlag xmlns="" xmlns:ma14="http://schemas.microsoft.com/office/mac/drawingml/2011/main" val="0"/>
             </a:ext>
           </a:extLst>
         </p:spPr>
@@ -33946,7 +34052,7 @@
           </a:prstGeom>
           <a:extLst>
             <a:ext uri="{C572A759-6A51-4108-AA02-DFA0A04FC94B}">
-              <ma14:wrappingTextBoxFlag xmlns:ma14="http://schemas.microsoft.com/office/mac/drawingml/2011/main" xmlns="" val="0"/>
+              <ma14:wrappingTextBoxFlag xmlns="" xmlns:ma14="http://schemas.microsoft.com/office/mac/drawingml/2011/main" val="0"/>
             </a:ext>
           </a:extLst>
         </p:spPr>
@@ -34733,7 +34839,7 @@
           </a:prstGeom>
           <a:extLst>
             <a:ext uri="{C572A759-6A51-4108-AA02-DFA0A04FC94B}">
-              <ma14:wrappingTextBoxFlag xmlns:ma14="http://schemas.microsoft.com/office/mac/drawingml/2011/main" xmlns="" val="0"/>
+              <ma14:wrappingTextBoxFlag xmlns="" xmlns:ma14="http://schemas.microsoft.com/office/mac/drawingml/2011/main" val="0"/>
             </a:ext>
           </a:extLst>
         </p:spPr>
@@ -35533,7 +35639,7 @@
           </a:prstGeom>
           <a:extLst>
             <a:ext uri="{C572A759-6A51-4108-AA02-DFA0A04FC94B}">
-              <ma14:wrappingTextBoxFlag xmlns:ma14="http://schemas.microsoft.com/office/mac/drawingml/2011/main" xmlns="" val="0"/>
+              <ma14:wrappingTextBoxFlag xmlns="" xmlns:ma14="http://schemas.microsoft.com/office/mac/drawingml/2011/main" val="0"/>
             </a:ext>
           </a:extLst>
         </p:spPr>
@@ -35995,7 +36101,7 @@
           </a:prstGeom>
           <a:extLst>
             <a:ext uri="{C572A759-6A51-4108-AA02-DFA0A04FC94B}">
-              <ma14:wrappingTextBoxFlag xmlns:ma14="http://schemas.microsoft.com/office/mac/drawingml/2011/main" xmlns="" val="0"/>
+              <ma14:wrappingTextBoxFlag xmlns="" xmlns:ma14="http://schemas.microsoft.com/office/mac/drawingml/2011/main" val="0"/>
             </a:ext>
           </a:extLst>
         </p:spPr>

--- a/documentation/AI Presentation Coach.pptx
+++ b/documentation/AI Presentation Coach.pptx
@@ -1713,7 +1713,7 @@
           </a:prstGeom>
           <a:extLst>
             <a:ext uri="{C572A759-6A51-4108-AA02-DFA0A04FC94B}">
-              <ma14:wrappingTextBoxFlag xmlns="" xmlns:ma14="http://schemas.microsoft.com/office/mac/drawingml/2011/main" val="0"/>
+              <ma14:wrappingTextBoxFlag xmlns:ma14="http://schemas.microsoft.com/office/mac/drawingml/2011/main" xmlns="" val="0"/>
             </a:ext>
           </a:extLst>
         </p:spPr>
@@ -1866,7 +1866,7 @@
           </a:prstGeom>
           <a:extLst>
             <a:ext uri="{C572A759-6A51-4108-AA02-DFA0A04FC94B}">
-              <ma14:wrappingTextBoxFlag xmlns="" xmlns:ma14="http://schemas.microsoft.com/office/mac/drawingml/2011/main" val="0"/>
+              <ma14:wrappingTextBoxFlag xmlns:ma14="http://schemas.microsoft.com/office/mac/drawingml/2011/main" xmlns="" val="0"/>
             </a:ext>
           </a:extLst>
         </p:spPr>
@@ -4804,7 +4804,7 @@
         <p:spPr>
           <a:xfrm>
             <a:off x="8565005" y="2119074"/>
-            <a:ext cx="3255518" cy="3231654"/>
+            <a:ext cx="3255518" cy="4062651"/>
           </a:xfrm>
           <a:prstGeom prst="rect">
             <a:avLst/>
@@ -4882,7 +4882,7 @@
                   <a:schemeClr val="bg1"/>
                 </a:solidFill>
               </a:rPr>
-              <a:t>LLM usage is not included in these costs</a:t>
+              <a:t>LLM usage was not included in these costs. They usually show up each day but were delayed in June.</a:t>
             </a:r>
           </a:p>
           <a:p>
@@ -6058,7 +6058,7 @@
           </a:prstGeom>
           <a:extLst>
             <a:ext uri="{C572A759-6A51-4108-AA02-DFA0A04FC94B}">
-              <ma14:wrappingTextBoxFlag xmlns="" xmlns:ma14="http://schemas.microsoft.com/office/mac/drawingml/2011/main" val="0"/>
+              <ma14:wrappingTextBoxFlag xmlns:ma14="http://schemas.microsoft.com/office/mac/drawingml/2011/main" xmlns="" val="0"/>
             </a:ext>
           </a:extLst>
         </p:spPr>
@@ -26282,7 +26282,7 @@
         </p:nvSpPr>
         <p:spPr>
           <a:xfrm>
-            <a:off x="1408176" y="5084064"/>
+            <a:off x="1103375" y="5084064"/>
             <a:ext cx="2011680" cy="530352"/>
           </a:xfrm>
           <a:prstGeom prst="rect">
@@ -26320,7 +26320,7 @@
         </p:nvSpPr>
         <p:spPr>
           <a:xfrm>
-            <a:off x="1408176" y="5669280"/>
+            <a:off x="1103375" y="5669280"/>
             <a:ext cx="2011680" cy="384048"/>
           </a:xfrm>
           <a:prstGeom prst="rect">
@@ -26358,7 +26358,7 @@
         </p:nvSpPr>
         <p:spPr>
           <a:xfrm>
-            <a:off x="4224528" y="5084064"/>
+            <a:off x="3955585" y="5084064"/>
             <a:ext cx="1828800" cy="530352"/>
           </a:xfrm>
           <a:prstGeom prst="rect">
@@ -26396,7 +26396,7 @@
         </p:nvSpPr>
         <p:spPr>
           <a:xfrm>
-            <a:off x="4224528" y="5669280"/>
+            <a:off x="3955585" y="5669280"/>
             <a:ext cx="1828800" cy="384048"/>
           </a:xfrm>
           <a:prstGeom prst="rect">
@@ -26510,7 +26510,7 @@
         </p:nvSpPr>
         <p:spPr>
           <a:xfrm>
-            <a:off x="8997696" y="5084064"/>
+            <a:off x="9275602" y="5084064"/>
             <a:ext cx="2011680" cy="530352"/>
           </a:xfrm>
           <a:prstGeom prst="rect">
@@ -26531,12 +26531,16 @@
             <a:r>
               <a:rPr lang="en-US" sz="2600" b="1" dirty="0">
                 <a:solidFill>
-                  <a:srgbClr val="FF9B55"/>
+                  <a:srgbClr val="B68CFF"/>
                 </a:solidFill>
               </a:rPr>
               <a:t>~$0</a:t>
             </a:r>
-            <a:endParaRPr lang="en-US" sz="2600" dirty="0"/>
+            <a:endParaRPr lang="en-US" sz="2600" dirty="0">
+              <a:solidFill>
+                <a:srgbClr val="B68CFF"/>
+              </a:solidFill>
+            </a:endParaRPr>
           </a:p>
         </p:txBody>
       </p:sp>
@@ -26548,7 +26552,7 @@
         </p:nvSpPr>
         <p:spPr>
           <a:xfrm>
-            <a:off x="8997696" y="5669280"/>
+            <a:off x="9275602" y="5669280"/>
             <a:ext cx="2011680" cy="384048"/>
           </a:xfrm>
           <a:prstGeom prst="rect">
@@ -26636,7 +26640,7 @@
           </a:prstGeom>
           <a:extLst>
             <a:ext uri="{C572A759-6A51-4108-AA02-DFA0A04FC94B}">
-              <ma14:wrappingTextBoxFlag xmlns="" xmlns:ma14="http://schemas.microsoft.com/office/mac/drawingml/2011/main" val="0"/>
+              <ma14:wrappingTextBoxFlag xmlns:ma14="http://schemas.microsoft.com/office/mac/drawingml/2011/main" xmlns="" val="0"/>
             </a:ext>
           </a:extLst>
         </p:spPr>
@@ -27781,7 +27785,7 @@
           </a:prstGeom>
           <a:extLst>
             <a:ext uri="{C572A759-6A51-4108-AA02-DFA0A04FC94B}">
-              <ma14:wrappingTextBoxFlag xmlns="" xmlns:ma14="http://schemas.microsoft.com/office/mac/drawingml/2011/main" val="0"/>
+              <ma14:wrappingTextBoxFlag xmlns:ma14="http://schemas.microsoft.com/office/mac/drawingml/2011/main" xmlns="" val="0"/>
             </a:ext>
           </a:extLst>
         </p:spPr>
@@ -28964,7 +28968,7 @@
           </a:prstGeom>
           <a:extLst>
             <a:ext uri="{C572A759-6A51-4108-AA02-DFA0A04FC94B}">
-              <ma14:wrappingTextBoxFlag xmlns="" xmlns:ma14="http://schemas.microsoft.com/office/mac/drawingml/2011/main" val="0"/>
+              <ma14:wrappingTextBoxFlag xmlns:ma14="http://schemas.microsoft.com/office/mac/drawingml/2011/main" xmlns="" val="0"/>
             </a:ext>
           </a:extLst>
         </p:spPr>
@@ -29719,7 +29723,7 @@
           </a:prstGeom>
           <a:extLst>
             <a:ext uri="{C572A759-6A51-4108-AA02-DFA0A04FC94B}">
-              <ma14:wrappingTextBoxFlag xmlns="" xmlns:ma14="http://schemas.microsoft.com/office/mac/drawingml/2011/main" val="0"/>
+              <ma14:wrappingTextBoxFlag xmlns:ma14="http://schemas.microsoft.com/office/mac/drawingml/2011/main" xmlns="" val="0"/>
             </a:ext>
           </a:extLst>
         </p:spPr>
@@ -30727,7 +30731,7 @@
           </a:prstGeom>
           <a:extLst>
             <a:ext uri="{C572A759-6A51-4108-AA02-DFA0A04FC94B}">
-              <ma14:wrappingTextBoxFlag xmlns="" xmlns:ma14="http://schemas.microsoft.com/office/mac/drawingml/2011/main" val="0"/>
+              <ma14:wrappingTextBoxFlag xmlns:ma14="http://schemas.microsoft.com/office/mac/drawingml/2011/main" xmlns="" val="0"/>
             </a:ext>
           </a:extLst>
         </p:spPr>
@@ -30898,7 +30902,7 @@
                   <a:schemeClr val="accent2"/>
                 </a:solidFill>
               </a:rPr>
-              <a:t>Infrastructure only: LLM costs must be determined; cost and output will vary by LLM.</a:t>
+              <a:t>Infrastructure only: LLM costs must be determined; cost and output will vary based on LLMs used.</a:t>
             </a:r>
           </a:p>
         </p:txBody>
@@ -31072,7 +31076,7 @@
         </p:nvSpPr>
         <p:spPr>
           <a:xfrm>
-            <a:off x="2511910" y="2395728"/>
+            <a:off x="2924285" y="2395728"/>
             <a:ext cx="2743200" cy="310896"/>
           </a:xfrm>
           <a:prstGeom prst="rect">
@@ -31110,7 +31114,7 @@
         </p:nvSpPr>
         <p:spPr>
           <a:xfrm>
-            <a:off x="6460863" y="2395728"/>
+            <a:off x="6873238" y="2395728"/>
             <a:ext cx="3063240" cy="310896"/>
           </a:xfrm>
           <a:prstGeom prst="rect">
@@ -31148,7 +31152,7 @@
         </p:nvSpPr>
         <p:spPr>
           <a:xfrm>
-            <a:off x="822960" y="2834640"/>
+            <a:off x="1235335" y="2834640"/>
             <a:ext cx="1508760" cy="347472"/>
           </a:xfrm>
           <a:prstGeom prst="roundRect">
@@ -31196,7 +31200,7 @@
         </p:nvSpPr>
         <p:spPr>
           <a:xfrm>
-            <a:off x="2450592" y="2779776"/>
+            <a:off x="2862967" y="2779776"/>
             <a:ext cx="2743200" cy="457200"/>
           </a:xfrm>
           <a:prstGeom prst="roundRect">
@@ -31242,7 +31246,7 @@
         </p:nvSpPr>
         <p:spPr>
           <a:xfrm>
-            <a:off x="6428232" y="2779776"/>
+            <a:off x="6840607" y="2779776"/>
             <a:ext cx="3154680" cy="457200"/>
           </a:xfrm>
           <a:prstGeom prst="roundRect">
@@ -31288,7 +31292,7 @@
         </p:nvSpPr>
         <p:spPr>
           <a:xfrm>
-            <a:off x="822960" y="3493008"/>
+            <a:off x="1235335" y="3493008"/>
             <a:ext cx="1508760" cy="347472"/>
           </a:xfrm>
           <a:prstGeom prst="roundRect">
@@ -31336,7 +31340,7 @@
         </p:nvSpPr>
         <p:spPr>
           <a:xfrm>
-            <a:off x="2450592" y="3438144"/>
+            <a:off x="2862967" y="3438144"/>
             <a:ext cx="2743200" cy="457200"/>
           </a:xfrm>
           <a:prstGeom prst="roundRect">
@@ -31382,7 +31386,7 @@
         </p:nvSpPr>
         <p:spPr>
           <a:xfrm>
-            <a:off x="6428232" y="3438144"/>
+            <a:off x="6840607" y="3438144"/>
             <a:ext cx="3154680" cy="457200"/>
           </a:xfrm>
           <a:prstGeom prst="roundRect">
@@ -31428,7 +31432,7 @@
         </p:nvSpPr>
         <p:spPr>
           <a:xfrm>
-            <a:off x="822960" y="4151376"/>
+            <a:off x="1235335" y="4151376"/>
             <a:ext cx="1508760" cy="347472"/>
           </a:xfrm>
           <a:prstGeom prst="roundRect">
@@ -31476,7 +31480,7 @@
         </p:nvSpPr>
         <p:spPr>
           <a:xfrm>
-            <a:off x="2450592" y="4096512"/>
+            <a:off x="2862967" y="4096512"/>
             <a:ext cx="2743200" cy="457200"/>
           </a:xfrm>
           <a:prstGeom prst="roundRect">
@@ -31508,7 +31512,15 @@
                   <a:srgbClr val="F5F7FA"/>
                 </a:solidFill>
               </a:rPr>
-              <a:t>~50-100 ms per file</a:t>
+              <a:t>~50-100 </a:t>
+            </a:r>
+            <a:r>
+              <a:rPr lang="en-US" sz="1080" dirty="0" err="1">
+                <a:solidFill>
+                  <a:srgbClr val="F5F7FA"/>
+                </a:solidFill>
+              </a:rPr>
+              <a:t>ms</a:t>
             </a:r>
             <a:endParaRPr lang="en-US" sz="1080" dirty="0"/>
           </a:p>
@@ -31522,7 +31534,7 @@
         </p:nvSpPr>
         <p:spPr>
           <a:xfrm>
-            <a:off x="6428232" y="4096512"/>
+            <a:off x="6840607" y="4096512"/>
             <a:ext cx="3154680" cy="457200"/>
           </a:xfrm>
           <a:prstGeom prst="roundRect">
@@ -31568,7 +31580,7 @@
         </p:nvSpPr>
         <p:spPr>
           <a:xfrm>
-            <a:off x="822960" y="4809744"/>
+            <a:off x="1235335" y="4809744"/>
             <a:ext cx="1508760" cy="347472"/>
           </a:xfrm>
           <a:prstGeom prst="roundRect">
@@ -31616,7 +31628,7 @@
         </p:nvSpPr>
         <p:spPr>
           <a:xfrm>
-            <a:off x="2450592" y="4754880"/>
+            <a:off x="2862967" y="4754880"/>
             <a:ext cx="2743200" cy="457200"/>
           </a:xfrm>
           <a:prstGeom prst="roundRect">
@@ -31662,7 +31674,7 @@
         </p:nvSpPr>
         <p:spPr>
           <a:xfrm>
-            <a:off x="6428232" y="4754880"/>
+            <a:off x="6840607" y="4754880"/>
             <a:ext cx="3154680" cy="457200"/>
           </a:xfrm>
           <a:prstGeom prst="roundRect">
@@ -31804,7 +31816,7 @@
           </a:prstGeom>
           <a:extLst>
             <a:ext uri="{C572A759-6A51-4108-AA02-DFA0A04FC94B}">
-              <ma14:wrappingTextBoxFlag xmlns="" xmlns:ma14="http://schemas.microsoft.com/office/mac/drawingml/2011/main" val="0"/>
+              <ma14:wrappingTextBoxFlag xmlns:ma14="http://schemas.microsoft.com/office/mac/drawingml/2011/main" xmlns="" val="0"/>
             </a:ext>
           </a:extLst>
         </p:spPr>
@@ -32461,7 +32473,7 @@
           </a:prstGeom>
           <a:extLst>
             <a:ext uri="{C572A759-6A51-4108-AA02-DFA0A04FC94B}">
-              <ma14:wrappingTextBoxFlag xmlns="" xmlns:ma14="http://schemas.microsoft.com/office/mac/drawingml/2011/main" val="0"/>
+              <ma14:wrappingTextBoxFlag xmlns:ma14="http://schemas.microsoft.com/office/mac/drawingml/2011/main" xmlns="" val="0"/>
             </a:ext>
           </a:extLst>
         </p:spPr>
@@ -33342,7 +33354,7 @@
           </a:prstGeom>
           <a:extLst>
             <a:ext uri="{C572A759-6A51-4108-AA02-DFA0A04FC94B}">
-              <ma14:wrappingTextBoxFlag xmlns="" xmlns:ma14="http://schemas.microsoft.com/office/mac/drawingml/2011/main" val="0"/>
+              <ma14:wrappingTextBoxFlag xmlns:ma14="http://schemas.microsoft.com/office/mac/drawingml/2011/main" xmlns="" val="0"/>
             </a:ext>
           </a:extLst>
         </p:spPr>
@@ -34052,7 +34064,7 @@
           </a:prstGeom>
           <a:extLst>
             <a:ext uri="{C572A759-6A51-4108-AA02-DFA0A04FC94B}">
-              <ma14:wrappingTextBoxFlag xmlns="" xmlns:ma14="http://schemas.microsoft.com/office/mac/drawingml/2011/main" val="0"/>
+              <ma14:wrappingTextBoxFlag xmlns:ma14="http://schemas.microsoft.com/office/mac/drawingml/2011/main" xmlns="" val="0"/>
             </a:ext>
           </a:extLst>
         </p:spPr>
@@ -34839,7 +34851,7 @@
           </a:prstGeom>
           <a:extLst>
             <a:ext uri="{C572A759-6A51-4108-AA02-DFA0A04FC94B}">
-              <ma14:wrappingTextBoxFlag xmlns="" xmlns:ma14="http://schemas.microsoft.com/office/mac/drawingml/2011/main" val="0"/>
+              <ma14:wrappingTextBoxFlag xmlns:ma14="http://schemas.microsoft.com/office/mac/drawingml/2011/main" xmlns="" val="0"/>
             </a:ext>
           </a:extLst>
         </p:spPr>
@@ -35639,7 +35651,7 @@
           </a:prstGeom>
           <a:extLst>
             <a:ext uri="{C572A759-6A51-4108-AA02-DFA0A04FC94B}">
-              <ma14:wrappingTextBoxFlag xmlns="" xmlns:ma14="http://schemas.microsoft.com/office/mac/drawingml/2011/main" val="0"/>
+              <ma14:wrappingTextBoxFlag xmlns:ma14="http://schemas.microsoft.com/office/mac/drawingml/2011/main" xmlns="" val="0"/>
             </a:ext>
           </a:extLst>
         </p:spPr>
@@ -36101,7 +36113,7 @@
           </a:prstGeom>
           <a:extLst>
             <a:ext uri="{C572A759-6A51-4108-AA02-DFA0A04FC94B}">
-              <ma14:wrappingTextBoxFlag xmlns="" xmlns:ma14="http://schemas.microsoft.com/office/mac/drawingml/2011/main" val="0"/>
+              <ma14:wrappingTextBoxFlag xmlns:ma14="http://schemas.microsoft.com/office/mac/drawingml/2011/main" xmlns="" val="0"/>
             </a:ext>
           </a:extLst>
         </p:spPr>
@@ -49532,7 +49544,7 @@
         </p:nvSpPr>
         <p:spPr>
           <a:xfrm>
-            <a:off x="1322834" y="3648067"/>
+            <a:off x="1322834" y="4481786"/>
             <a:ext cx="1552354" cy="1477328"/>
           </a:xfrm>
           <a:prstGeom prst="rect">
@@ -49777,7 +49789,7 @@
         <p:spPr>
           <a:xfrm flipV="1">
             <a:off x="2875188" y="3014856"/>
-            <a:ext cx="1745294" cy="1371875"/>
+            <a:ext cx="1745294" cy="2205594"/>
           </a:xfrm>
           <a:prstGeom prst="line">
             <a:avLst/>
@@ -49817,8 +49829,8 @@
         </p:nvCxnSpPr>
         <p:spPr>
           <a:xfrm>
-            <a:off x="2875188" y="4386731"/>
-            <a:ext cx="1754438" cy="1865251"/>
+            <a:off x="2875188" y="5220450"/>
+            <a:ext cx="1754438" cy="1031532"/>
           </a:xfrm>
           <a:prstGeom prst="line">
             <a:avLst/>

--- a/documentation/AI Presentation Coach.pptx
+++ b/documentation/AI Presentation Coach.pptx
@@ -912,7 +912,10 @@
           <a:bodyPr/>
           <a:lstStyle/>
           <a:p>
-            <a:endParaRPr lang="en-US" dirty="0"/>
+            <a:r>
+              <a:rPr lang="en-US" dirty="0"/>
+              <a:t>Check the number of tests…</a:t>
+            </a:r>
           </a:p>
         </p:txBody>
       </p:sp>
@@ -1713,7 +1716,7 @@
           </a:prstGeom>
           <a:extLst>
             <a:ext uri="{C572A759-6A51-4108-AA02-DFA0A04FC94B}">
-              <ma14:wrappingTextBoxFlag xmlns:ma14="http://schemas.microsoft.com/office/mac/drawingml/2011/main" xmlns="" val="0"/>
+              <ma14:wrappingTextBoxFlag xmlns="" xmlns:ma14="http://schemas.microsoft.com/office/mac/drawingml/2011/main" val="0"/>
             </a:ext>
           </a:extLst>
         </p:spPr>
@@ -1866,7 +1869,7 @@
           </a:prstGeom>
           <a:extLst>
             <a:ext uri="{C572A759-6A51-4108-AA02-DFA0A04FC94B}">
-              <ma14:wrappingTextBoxFlag xmlns:ma14="http://schemas.microsoft.com/office/mac/drawingml/2011/main" xmlns="" val="0"/>
+              <ma14:wrappingTextBoxFlag xmlns="" xmlns:ma14="http://schemas.microsoft.com/office/mac/drawingml/2011/main" val="0"/>
             </a:ext>
           </a:extLst>
         </p:spPr>
@@ -5589,7 +5592,7 @@
                   <a:srgbClr val="FFD65A"/>
                 </a:solidFill>
               </a:rPr>
-              <a:t>726</a:t>
+              <a:t>&gt;900</a:t>
             </a:r>
             <a:endParaRPr lang="en-US" sz="2600" dirty="0"/>
           </a:p>
@@ -6058,7 +6061,7 @@
           </a:prstGeom>
           <a:extLst>
             <a:ext uri="{C572A759-6A51-4108-AA02-DFA0A04FC94B}">
-              <ma14:wrappingTextBoxFlag xmlns:ma14="http://schemas.microsoft.com/office/mac/drawingml/2011/main" xmlns="" val="0"/>
+              <ma14:wrappingTextBoxFlag xmlns="" xmlns:ma14="http://schemas.microsoft.com/office/mac/drawingml/2011/main" val="0"/>
             </a:ext>
           </a:extLst>
         </p:spPr>
@@ -26640,7 +26643,7 @@
           </a:prstGeom>
           <a:extLst>
             <a:ext uri="{C572A759-6A51-4108-AA02-DFA0A04FC94B}">
-              <ma14:wrappingTextBoxFlag xmlns:ma14="http://schemas.microsoft.com/office/mac/drawingml/2011/main" xmlns="" val="0"/>
+              <ma14:wrappingTextBoxFlag xmlns="" xmlns:ma14="http://schemas.microsoft.com/office/mac/drawingml/2011/main" val="0"/>
             </a:ext>
           </a:extLst>
         </p:spPr>
@@ -27785,7 +27788,7 @@
           </a:prstGeom>
           <a:extLst>
             <a:ext uri="{C572A759-6A51-4108-AA02-DFA0A04FC94B}">
-              <ma14:wrappingTextBoxFlag xmlns:ma14="http://schemas.microsoft.com/office/mac/drawingml/2011/main" xmlns="" val="0"/>
+              <ma14:wrappingTextBoxFlag xmlns="" xmlns:ma14="http://schemas.microsoft.com/office/mac/drawingml/2011/main" val="0"/>
             </a:ext>
           </a:extLst>
         </p:spPr>
@@ -28968,7 +28971,7 @@
           </a:prstGeom>
           <a:extLst>
             <a:ext uri="{C572A759-6A51-4108-AA02-DFA0A04FC94B}">
-              <ma14:wrappingTextBoxFlag xmlns:ma14="http://schemas.microsoft.com/office/mac/drawingml/2011/main" xmlns="" val="0"/>
+              <ma14:wrappingTextBoxFlag xmlns="" xmlns:ma14="http://schemas.microsoft.com/office/mac/drawingml/2011/main" val="0"/>
             </a:ext>
           </a:extLst>
         </p:spPr>
@@ -29723,7 +29726,7 @@
           </a:prstGeom>
           <a:extLst>
             <a:ext uri="{C572A759-6A51-4108-AA02-DFA0A04FC94B}">
-              <ma14:wrappingTextBoxFlag xmlns:ma14="http://schemas.microsoft.com/office/mac/drawingml/2011/main" xmlns="" val="0"/>
+              <ma14:wrappingTextBoxFlag xmlns="" xmlns:ma14="http://schemas.microsoft.com/office/mac/drawingml/2011/main" val="0"/>
             </a:ext>
           </a:extLst>
         </p:spPr>
@@ -30731,7 +30734,7 @@
           </a:prstGeom>
           <a:extLst>
             <a:ext uri="{C572A759-6A51-4108-AA02-DFA0A04FC94B}">
-              <ma14:wrappingTextBoxFlag xmlns:ma14="http://schemas.microsoft.com/office/mac/drawingml/2011/main" xmlns="" val="0"/>
+              <ma14:wrappingTextBoxFlag xmlns="" xmlns:ma14="http://schemas.microsoft.com/office/mac/drawingml/2011/main" val="0"/>
             </a:ext>
           </a:extLst>
         </p:spPr>
@@ -31816,7 +31819,7 @@
           </a:prstGeom>
           <a:extLst>
             <a:ext uri="{C572A759-6A51-4108-AA02-DFA0A04FC94B}">
-              <ma14:wrappingTextBoxFlag xmlns:ma14="http://schemas.microsoft.com/office/mac/drawingml/2011/main" xmlns="" val="0"/>
+              <ma14:wrappingTextBoxFlag xmlns="" xmlns:ma14="http://schemas.microsoft.com/office/mac/drawingml/2011/main" val="0"/>
             </a:ext>
           </a:extLst>
         </p:spPr>
@@ -32473,7 +32476,7 @@
           </a:prstGeom>
           <a:extLst>
             <a:ext uri="{C572A759-6A51-4108-AA02-DFA0A04FC94B}">
-              <ma14:wrappingTextBoxFlag xmlns:ma14="http://schemas.microsoft.com/office/mac/drawingml/2011/main" xmlns="" val="0"/>
+              <ma14:wrappingTextBoxFlag xmlns="" xmlns:ma14="http://schemas.microsoft.com/office/mac/drawingml/2011/main" val="0"/>
             </a:ext>
           </a:extLst>
         </p:spPr>
@@ -33354,7 +33357,7 @@
           </a:prstGeom>
           <a:extLst>
             <a:ext uri="{C572A759-6A51-4108-AA02-DFA0A04FC94B}">
-              <ma14:wrappingTextBoxFlag xmlns:ma14="http://schemas.microsoft.com/office/mac/drawingml/2011/main" xmlns="" val="0"/>
+              <ma14:wrappingTextBoxFlag xmlns="" xmlns:ma14="http://schemas.microsoft.com/office/mac/drawingml/2011/main" val="0"/>
             </a:ext>
           </a:extLst>
         </p:spPr>
@@ -34064,7 +34067,7 @@
           </a:prstGeom>
           <a:extLst>
             <a:ext uri="{C572A759-6A51-4108-AA02-DFA0A04FC94B}">
-              <ma14:wrappingTextBoxFlag xmlns:ma14="http://schemas.microsoft.com/office/mac/drawingml/2011/main" xmlns="" val="0"/>
+              <ma14:wrappingTextBoxFlag xmlns="" xmlns:ma14="http://schemas.microsoft.com/office/mac/drawingml/2011/main" val="0"/>
             </a:ext>
           </a:extLst>
         </p:spPr>
@@ -34851,7 +34854,7 @@
           </a:prstGeom>
           <a:extLst>
             <a:ext uri="{C572A759-6A51-4108-AA02-DFA0A04FC94B}">
-              <ma14:wrappingTextBoxFlag xmlns:ma14="http://schemas.microsoft.com/office/mac/drawingml/2011/main" xmlns="" val="0"/>
+              <ma14:wrappingTextBoxFlag xmlns="" xmlns:ma14="http://schemas.microsoft.com/office/mac/drawingml/2011/main" val="0"/>
             </a:ext>
           </a:extLst>
         </p:spPr>
@@ -35651,7 +35654,7 @@
           </a:prstGeom>
           <a:extLst>
             <a:ext uri="{C572A759-6A51-4108-AA02-DFA0A04FC94B}">
-              <ma14:wrappingTextBoxFlag xmlns:ma14="http://schemas.microsoft.com/office/mac/drawingml/2011/main" xmlns="" val="0"/>
+              <ma14:wrappingTextBoxFlag xmlns="" xmlns:ma14="http://schemas.microsoft.com/office/mac/drawingml/2011/main" val="0"/>
             </a:ext>
           </a:extLst>
         </p:spPr>
@@ -36113,7 +36116,7 @@
           </a:prstGeom>
           <a:extLst>
             <a:ext uri="{C572A759-6A51-4108-AA02-DFA0A04FC94B}">
-              <ma14:wrappingTextBoxFlag xmlns:ma14="http://schemas.microsoft.com/office/mac/drawingml/2011/main" xmlns="" val="0"/>
+              <ma14:wrappingTextBoxFlag xmlns="" xmlns:ma14="http://schemas.microsoft.com/office/mac/drawingml/2011/main" val="0"/>
             </a:ext>
           </a:extLst>
         </p:spPr>
@@ -50216,7 +50219,7 @@
         <p:spPr>
           <a:xfrm>
             <a:off x="7497703" y="1740322"/>
-            <a:ext cx="4092402" cy="3231654"/>
+            <a:ext cx="4316823" cy="4339650"/>
           </a:xfrm>
           <a:prstGeom prst="rect">
             <a:avLst/>
@@ -50230,20 +50233,13 @@
           <a:lstStyle/>
           <a:p>
             <a:r>
-              <a:rPr lang="en-US" sz="2400" b="1" dirty="0">
+              <a:rPr lang="en-US" dirty="0">
                 <a:solidFill>
                   <a:schemeClr val="bg1"/>
                 </a:solidFill>
               </a:rPr>
-              <a:t>Groups:</a:t>
+              <a:t>Groups to define role</a:t>
             </a:r>
-          </a:p>
-          <a:p>
-            <a:endParaRPr lang="en-US" dirty="0">
-              <a:solidFill>
-                <a:schemeClr val="bg1"/>
-              </a:solidFill>
-            </a:endParaRPr>
           </a:p>
           <a:p>
             <a:pPr marL="285750" indent="-285750">
@@ -50291,7 +50287,7 @@
                   <a:schemeClr val="bg1"/>
                 </a:solidFill>
               </a:rPr>
-              <a:t>Other Cognito Functions implemented</a:t>
+              <a:t>Other Cognito Functions</a:t>
             </a:r>
           </a:p>
           <a:p>
@@ -50347,7 +50343,7 @@
                   <a:schemeClr val="bg1"/>
                 </a:solidFill>
               </a:rPr>
-              <a:t>MFA not implemented in MVP</a:t>
+              <a:t>MFA (not turned on yet)</a:t>
             </a:r>
           </a:p>
           <a:p>
@@ -50357,6 +50353,65 @@
               </a:solidFill>
             </a:endParaRPr>
           </a:p>
+          <a:p>
+            <a:r>
+              <a:rPr lang="en-US" dirty="0">
+                <a:solidFill>
+                  <a:schemeClr val="bg1"/>
+                </a:solidFill>
+              </a:rPr>
+              <a:t>Managed Service</a:t>
+            </a:r>
+          </a:p>
+          <a:p>
+            <a:pPr marL="285750" indent="-285750">
+              <a:buFont typeface="Arial" panose="020B0604020202020204" pitchFamily="34" charset="0"/>
+              <a:buChar char="•"/>
+            </a:pPr>
+            <a:r>
+              <a:rPr lang="en-US" dirty="0">
+                <a:solidFill>
+                  <a:schemeClr val="bg1"/>
+                </a:solidFill>
+              </a:rPr>
+              <a:t>No Infrastructure or services to admin</a:t>
+            </a:r>
+          </a:p>
+          <a:p>
+            <a:pPr marL="285750" indent="-285750">
+              <a:buFont typeface="Arial" panose="020B0604020202020204" pitchFamily="34" charset="0"/>
+              <a:buChar char="•"/>
+            </a:pPr>
+            <a:r>
+              <a:rPr lang="en-US" dirty="0">
+                <a:solidFill>
+                  <a:schemeClr val="bg1"/>
+                </a:solidFill>
+              </a:rPr>
+              <a:t>No code to write or maintain</a:t>
+            </a:r>
+          </a:p>
+          <a:p>
+            <a:pPr marL="285750" indent="-285750">
+              <a:buFont typeface="Arial" panose="020B0604020202020204" pitchFamily="34" charset="0"/>
+              <a:buChar char="•"/>
+            </a:pPr>
+            <a:r>
+              <a:rPr lang="en-US" dirty="0">
+                <a:solidFill>
+                  <a:schemeClr val="bg1"/>
+                </a:solidFill>
+              </a:rPr>
+              <a:t>No cost for under 50,000 users</a:t>
+            </a:r>
+          </a:p>
+          <a:p>
+            <a:endParaRPr lang="en-US" dirty="0">
+              <a:solidFill>
+                <a:schemeClr val="bg1"/>
+              </a:solidFill>
+            </a:endParaRPr>
+          </a:p>
         </p:txBody>
       </p:sp>
       <p:sp>
@@ -50396,6 +50451,67 @@
               </a:rPr>
               <a:t>Cognito Based User IAM</a:t>
             </a:r>
+          </a:p>
+        </p:txBody>
+      </p:sp>
+      <p:sp>
+        <p:nvSpPr>
+          <p:cNvPr id="4" name="TextBox 3">
+            <a:extLst>
+              <a:ext uri="{FF2B5EF4-FFF2-40B4-BE49-F238E27FC236}">
+                <a16:creationId xmlns:a16="http://schemas.microsoft.com/office/drawing/2014/main" id="{75A39317-1272-3A64-EC50-060329850D7F}"/>
+              </a:ext>
+            </a:extLst>
+          </p:cNvPr>
+          <p:cNvSpPr txBox="1"/>
+          <p:nvPr/>
+        </p:nvSpPr>
+        <p:spPr>
+          <a:xfrm>
+            <a:off x="2077618" y="4931044"/>
+            <a:ext cx="4145903" cy="646331"/>
+          </a:xfrm>
+          <a:prstGeom prst="rect">
+            <a:avLst/>
+          </a:prstGeom>
+          <a:noFill/>
+        </p:spPr>
+        <p:txBody>
+          <a:bodyPr wrap="square" rtlCol="0">
+            <a:spAutoFit/>
+          </a:bodyPr>
+          <a:lstStyle/>
+          <a:p>
+            <a:pPr algn="ctr"/>
+            <a:r>
+              <a:rPr lang="en-US" b="1" dirty="0">
+                <a:solidFill>
+                  <a:srgbClr val="FFC000"/>
+                </a:solidFill>
+              </a:rPr>
+              <a:t>All IAM functionality, including MFA, is a </a:t>
+            </a:r>
+            <a:r>
+              <a:rPr lang="en-US" b="1" i="1" u="sng" dirty="0">
+                <a:solidFill>
+                  <a:srgbClr val="FFC000"/>
+                </a:solidFill>
+              </a:rPr>
+              <a:t>no-cost</a:t>
+            </a:r>
+            <a:r>
+              <a:rPr lang="en-US" b="1" dirty="0">
+                <a:solidFill>
+                  <a:srgbClr val="FFC000"/>
+                </a:solidFill>
+              </a:rPr>
+              <a:t> managed service </a:t>
+            </a:r>
+            <a:endParaRPr lang="en-US" dirty="0">
+              <a:solidFill>
+                <a:schemeClr val="bg1"/>
+              </a:solidFill>
+            </a:endParaRPr>
           </a:p>
         </p:txBody>
       </p:sp>

--- a/documentation/AI Presentation Coach.pptx
+++ b/documentation/AI Presentation Coach.pptx
@@ -5,7 +5,7 @@
     <p:sldMasterId id="2147483648" r:id="rId1"/>
   </p:sldMasterIdLst>
   <p:notesMasterIdLst>
-    <p:notesMasterId r:id="rId46"/>
+    <p:notesMasterId r:id="rId47"/>
   </p:notesMasterIdLst>
   <p:sldIdLst>
     <p:sldId id="256" r:id="rId2"/>
@@ -19,39 +19,40 @@
     <p:sldId id="2147482025" r:id="rId10"/>
     <p:sldId id="2147482026" r:id="rId11"/>
     <p:sldId id="2147482027" r:id="rId12"/>
-    <p:sldId id="2147482028" r:id="rId13"/>
-    <p:sldId id="2147482029" r:id="rId14"/>
-    <p:sldId id="2147482047" r:id="rId15"/>
-    <p:sldId id="2147482048" r:id="rId16"/>
-    <p:sldId id="2147482049" r:id="rId17"/>
-    <p:sldId id="2147482030" r:id="rId18"/>
-    <p:sldId id="2147482031" r:id="rId19"/>
-    <p:sldId id="2147482032" r:id="rId20"/>
-    <p:sldId id="2147482041" r:id="rId21"/>
-    <p:sldId id="2147482043" r:id="rId22"/>
-    <p:sldId id="2147482042" r:id="rId23"/>
-    <p:sldId id="2147482044" r:id="rId24"/>
-    <p:sldId id="259" r:id="rId25"/>
-    <p:sldId id="260" r:id="rId26"/>
-    <p:sldId id="261" r:id="rId27"/>
-    <p:sldId id="262" r:id="rId28"/>
-    <p:sldId id="263" r:id="rId29"/>
-    <p:sldId id="264" r:id="rId30"/>
-    <p:sldId id="265" r:id="rId31"/>
-    <p:sldId id="266" r:id="rId32"/>
-    <p:sldId id="267" r:id="rId33"/>
-    <p:sldId id="268" r:id="rId34"/>
-    <p:sldId id="269" r:id="rId35"/>
-    <p:sldId id="270" r:id="rId36"/>
-    <p:sldId id="2147482036" r:id="rId37"/>
-    <p:sldId id="2147482002" r:id="rId38"/>
-    <p:sldId id="2147482003" r:id="rId39"/>
-    <p:sldId id="2147482004" r:id="rId40"/>
-    <p:sldId id="2147482005" r:id="rId41"/>
-    <p:sldId id="2147482009" r:id="rId42"/>
-    <p:sldId id="2147482045" r:id="rId43"/>
-    <p:sldId id="2147482046" r:id="rId44"/>
-    <p:sldId id="2147482039" r:id="rId45"/>
+    <p:sldId id="2147482050" r:id="rId13"/>
+    <p:sldId id="2147482028" r:id="rId14"/>
+    <p:sldId id="2147482029" r:id="rId15"/>
+    <p:sldId id="2147482047" r:id="rId16"/>
+    <p:sldId id="2147482048" r:id="rId17"/>
+    <p:sldId id="2147482049" r:id="rId18"/>
+    <p:sldId id="2147482030" r:id="rId19"/>
+    <p:sldId id="2147482031" r:id="rId20"/>
+    <p:sldId id="2147482032" r:id="rId21"/>
+    <p:sldId id="2147482041" r:id="rId22"/>
+    <p:sldId id="2147482043" r:id="rId23"/>
+    <p:sldId id="2147482042" r:id="rId24"/>
+    <p:sldId id="2147482044" r:id="rId25"/>
+    <p:sldId id="259" r:id="rId26"/>
+    <p:sldId id="260" r:id="rId27"/>
+    <p:sldId id="261" r:id="rId28"/>
+    <p:sldId id="262" r:id="rId29"/>
+    <p:sldId id="263" r:id="rId30"/>
+    <p:sldId id="264" r:id="rId31"/>
+    <p:sldId id="265" r:id="rId32"/>
+    <p:sldId id="266" r:id="rId33"/>
+    <p:sldId id="267" r:id="rId34"/>
+    <p:sldId id="268" r:id="rId35"/>
+    <p:sldId id="269" r:id="rId36"/>
+    <p:sldId id="270" r:id="rId37"/>
+    <p:sldId id="2147482036" r:id="rId38"/>
+    <p:sldId id="2147482002" r:id="rId39"/>
+    <p:sldId id="2147482003" r:id="rId40"/>
+    <p:sldId id="2147482004" r:id="rId41"/>
+    <p:sldId id="2147482005" r:id="rId42"/>
+    <p:sldId id="2147482009" r:id="rId43"/>
+    <p:sldId id="2147482045" r:id="rId44"/>
+    <p:sldId id="2147482046" r:id="rId45"/>
+    <p:sldId id="2147482039" r:id="rId46"/>
   </p:sldIdLst>
   <p:sldSz cx="12192000" cy="6858000"/>
   <p:notesSz cx="6858000" cy="12192000"/>
@@ -429,7 +430,7 @@
           <a:p>
             <a:fld id="{F7021451-1387-4CA6-816F-3879F97B5CBC}" type="slidenum">
               <a:rPr lang="en-US"/>
-              <a:t>29</a:t>
+              <a:t>30</a:t>
             </a:fld>
             <a:endParaRPr lang="en-US"/>
           </a:p>
@@ -513,7 +514,7 @@
           <a:p>
             <a:fld id="{F7021451-1387-4CA6-816F-3879F97B5CBC}" type="slidenum">
               <a:rPr lang="en-US"/>
-              <a:t>30</a:t>
+              <a:t>31</a:t>
             </a:fld>
             <a:endParaRPr lang="en-US"/>
           </a:p>
@@ -597,7 +598,7 @@
           <a:p>
             <a:fld id="{F7021451-1387-4CA6-816F-3879F97B5CBC}" type="slidenum">
               <a:rPr lang="en-US"/>
-              <a:t>31</a:t>
+              <a:t>32</a:t>
             </a:fld>
             <a:endParaRPr lang="en-US"/>
           </a:p>
@@ -681,7 +682,7 @@
           <a:p>
             <a:fld id="{F7021451-1387-4CA6-816F-3879F97B5CBC}" type="slidenum">
               <a:rPr lang="en-US"/>
-              <a:t>32</a:t>
+              <a:t>33</a:t>
             </a:fld>
             <a:endParaRPr lang="en-US"/>
           </a:p>
@@ -765,7 +766,7 @@
           <a:p>
             <a:fld id="{F7021451-1387-4CA6-816F-3879F97B5CBC}" type="slidenum">
               <a:rPr lang="en-US"/>
-              <a:t>33</a:t>
+              <a:t>34</a:t>
             </a:fld>
             <a:endParaRPr lang="en-US"/>
           </a:p>
@@ -849,7 +850,7 @@
           <a:p>
             <a:fld id="{F7021451-1387-4CA6-816F-3879F97B5CBC}" type="slidenum">
               <a:rPr lang="en-US"/>
-              <a:t>34</a:t>
+              <a:t>35</a:t>
             </a:fld>
             <a:endParaRPr lang="en-US"/>
           </a:p>
@@ -1215,7 +1216,7 @@
           <a:p>
             <a:fld id="{F7021451-1387-4CA6-816F-3879F97B5CBC}" type="slidenum">
               <a:rPr lang="en-US"/>
-              <a:t>24</a:t>
+              <a:t>25</a:t>
             </a:fld>
             <a:endParaRPr lang="en-US"/>
           </a:p>
@@ -1299,7 +1300,7 @@
           <a:p>
             <a:fld id="{F7021451-1387-4CA6-816F-3879F97B5CBC}" type="slidenum">
               <a:rPr lang="en-US"/>
-              <a:t>25</a:t>
+              <a:t>26</a:t>
             </a:fld>
             <a:endParaRPr lang="en-US"/>
           </a:p>
@@ -1383,7 +1384,7 @@
           <a:p>
             <a:fld id="{F7021451-1387-4CA6-816F-3879F97B5CBC}" type="slidenum">
               <a:rPr lang="en-US"/>
-              <a:t>26</a:t>
+              <a:t>27</a:t>
             </a:fld>
             <a:endParaRPr lang="en-US"/>
           </a:p>
@@ -1467,7 +1468,7 @@
           <a:p>
             <a:fld id="{F7021451-1387-4CA6-816F-3879F97B5CBC}" type="slidenum">
               <a:rPr lang="en-US"/>
-              <a:t>27</a:t>
+              <a:t>28</a:t>
             </a:fld>
             <a:endParaRPr lang="en-US"/>
           </a:p>
@@ -1551,7 +1552,7 @@
           <a:p>
             <a:fld id="{F7021451-1387-4CA6-816F-3879F97B5CBC}" type="slidenum">
               <a:rPr lang="en-US"/>
-              <a:t>28</a:t>
+              <a:t>29</a:t>
             </a:fld>
             <a:endParaRPr lang="en-US"/>
           </a:p>
@@ -1716,7 +1717,7 @@
           </a:prstGeom>
           <a:extLst>
             <a:ext uri="{C572A759-6A51-4108-AA02-DFA0A04FC94B}">
-              <ma14:wrappingTextBoxFlag xmlns="" xmlns:ma14="http://schemas.microsoft.com/office/mac/drawingml/2011/main" val="0"/>
+              <ma14:wrappingTextBoxFlag xmlns:ma14="http://schemas.microsoft.com/office/mac/drawingml/2011/main" xmlns="" val="0"/>
             </a:ext>
           </a:extLst>
         </p:spPr>
@@ -1869,7 +1870,7 @@
           </a:prstGeom>
           <a:extLst>
             <a:ext uri="{C572A759-6A51-4108-AA02-DFA0A04FC94B}">
-              <ma14:wrappingTextBoxFlag xmlns="" xmlns:ma14="http://schemas.microsoft.com/office/mac/drawingml/2011/main" val="0"/>
+              <ma14:wrappingTextBoxFlag xmlns:ma14="http://schemas.microsoft.com/office/mac/drawingml/2011/main" xmlns="" val="0"/>
             </a:ext>
           </a:extLst>
         </p:spPr>
@@ -2432,7 +2433,7 @@
         </p:blipFill>
         <p:spPr>
           <a:xfrm>
-            <a:off x="6419088" y="749808"/>
+            <a:off x="6419088" y="610108"/>
             <a:ext cx="5102352" cy="3063240"/>
           </a:xfrm>
           <a:prstGeom prst="rect">
@@ -2448,7 +2449,7 @@
         </p:nvSpPr>
         <p:spPr>
           <a:xfrm>
-            <a:off x="9930384" y="4087368"/>
+            <a:off x="9930384" y="3998468"/>
             <a:ext cx="1499616" cy="822960"/>
           </a:xfrm>
           <a:prstGeom prst="roundRect">
@@ -2508,7 +2509,7 @@
         </p:nvSpPr>
         <p:spPr>
           <a:xfrm>
-            <a:off x="9930384" y="5102352"/>
+            <a:off x="9930384" y="5013452"/>
             <a:ext cx="1499616" cy="786384"/>
           </a:xfrm>
           <a:prstGeom prst="roundRect">
@@ -2598,10 +2599,10 @@
       </p:sp>
       <p:pic>
         <p:nvPicPr>
-          <p:cNvPr id="12" name="Picture 11">
+          <p:cNvPr id="17" name="Picture 16">
             <a:extLst>
               <a:ext uri="{FF2B5EF4-FFF2-40B4-BE49-F238E27FC236}">
-                <a16:creationId xmlns:a16="http://schemas.microsoft.com/office/drawing/2014/main" id="{3A446344-8DD4-910A-F5F3-2EA5A28571E5}"/>
+                <a16:creationId xmlns:a16="http://schemas.microsoft.com/office/drawing/2014/main" id="{BE18B0C4-B91B-242C-89C8-F7BB22A2B39E}"/>
               </a:ext>
             </a:extLst>
           </p:cNvPr>
@@ -2612,14 +2613,15 @@
         </p:nvPicPr>
         <p:blipFill>
           <a:blip r:embed="rId4"/>
+          <a:srcRect b="17455"/>
           <a:stretch>
             <a:fillRect/>
           </a:stretch>
         </p:blipFill>
         <p:spPr>
           <a:xfrm>
-            <a:off x="7109293" y="3968496"/>
-            <a:ext cx="2536896" cy="2359152"/>
+            <a:off x="7255035" y="3791064"/>
+            <a:ext cx="2548349" cy="2667140"/>
           </a:xfrm>
           <a:prstGeom prst="rect">
             <a:avLst/>
@@ -3216,6 +3218,117 @@
   <p:cSld>
     <p:spTree>
       <p:nvGrpSpPr>
+        <p:cNvPr id="1" name=""/>
+        <p:cNvGrpSpPr/>
+        <p:nvPr/>
+      </p:nvGrpSpPr>
+      <p:grpSpPr>
+        <a:xfrm>
+          <a:off x="0" y="0"/>
+          <a:ext cx="0" cy="0"/>
+          <a:chOff x="0" y="0"/>
+          <a:chExt cx="0" cy="0"/>
+        </a:xfrm>
+      </p:grpSpPr>
+      <p:grpSp>
+        <p:nvGrpSpPr>
+          <p:cNvPr id="6" name="Group 5">
+            <a:extLst>
+              <a:ext uri="{FF2B5EF4-FFF2-40B4-BE49-F238E27FC236}">
+                <a16:creationId xmlns:a16="http://schemas.microsoft.com/office/drawing/2014/main" id="{1C155887-F310-0C23-61F8-579BF1E32618}"/>
+              </a:ext>
+            </a:extLst>
+          </p:cNvPr>
+          <p:cNvGrpSpPr/>
+          <p:nvPr/>
+        </p:nvGrpSpPr>
+        <p:grpSpPr>
+          <a:xfrm>
+            <a:off x="3394450" y="0"/>
+            <a:ext cx="5403099" cy="6858000"/>
+            <a:chOff x="3394450" y="0"/>
+            <a:chExt cx="5403099" cy="6858000"/>
+          </a:xfrm>
+        </p:grpSpPr>
+        <p:pic>
+          <p:nvPicPr>
+            <p:cNvPr id="3" name="Picture 2">
+              <a:extLst>
+                <a:ext uri="{FF2B5EF4-FFF2-40B4-BE49-F238E27FC236}">
+                  <a16:creationId xmlns:a16="http://schemas.microsoft.com/office/drawing/2014/main" id="{C71B7318-70DF-6903-0C39-2C3D82E0FA32}"/>
+                </a:ext>
+              </a:extLst>
+            </p:cNvPr>
+            <p:cNvPicPr>
+              <a:picLocks noChangeAspect="1"/>
+            </p:cNvPicPr>
+            <p:nvPr/>
+          </p:nvPicPr>
+          <p:blipFill>
+            <a:blip r:embed="rId2"/>
+            <a:stretch>
+              <a:fillRect/>
+            </a:stretch>
+          </p:blipFill>
+          <p:spPr>
+            <a:xfrm>
+              <a:off x="3394450" y="0"/>
+              <a:ext cx="5403099" cy="6858000"/>
+            </a:xfrm>
+            <a:prstGeom prst="rect">
+              <a:avLst/>
+            </a:prstGeom>
+          </p:spPr>
+        </p:pic>
+        <p:pic>
+          <p:nvPicPr>
+            <p:cNvPr id="5" name="Picture 4">
+              <a:extLst>
+                <a:ext uri="{FF2B5EF4-FFF2-40B4-BE49-F238E27FC236}">
+                  <a16:creationId xmlns:a16="http://schemas.microsoft.com/office/drawing/2014/main" id="{E5BEA449-1D19-6DFF-D6EF-CB4A03389D80}"/>
+                </a:ext>
+              </a:extLst>
+            </p:cNvPr>
+            <p:cNvPicPr>
+              <a:picLocks noChangeAspect="1"/>
+            </p:cNvPicPr>
+            <p:nvPr/>
+          </p:nvPicPr>
+          <p:blipFill>
+            <a:blip r:embed="rId3"/>
+            <a:stretch>
+              <a:fillRect/>
+            </a:stretch>
+          </p:blipFill>
+          <p:spPr>
+            <a:xfrm>
+              <a:off x="4822228" y="355601"/>
+              <a:ext cx="2547543" cy="667416"/>
+            </a:xfrm>
+            <a:prstGeom prst="rect">
+              <a:avLst/>
+            </a:prstGeom>
+          </p:spPr>
+        </p:pic>
+      </p:grpSp>
+    </p:spTree>
+    <p:extLst>
+      <p:ext uri="{BB962C8B-B14F-4D97-AF65-F5344CB8AC3E}">
+        <p14:creationId xmlns:p14="http://schemas.microsoft.com/office/powerpoint/2010/main" val="1829748140"/>
+      </p:ext>
+    </p:extLst>
+  </p:cSld>
+  <p:clrMapOvr>
+    <a:masterClrMapping/>
+  </p:clrMapOvr>
+</p:sld>
+</file>
+
+<file path=ppt/slides/slide13.xml><?xml version="1.0" encoding="utf-8"?>
+<p:sld xmlns:a="http://schemas.openxmlformats.org/drawingml/2006/main" xmlns:r="http://schemas.openxmlformats.org/officeDocument/2006/relationships" xmlns:p="http://schemas.openxmlformats.org/presentationml/2006/main">
+  <p:cSld>
+    <p:spTree>
+      <p:nvGrpSpPr>
         <p:cNvPr id="1" name="">
           <a:extLst>
             <a:ext uri="{FF2B5EF4-FFF2-40B4-BE49-F238E27FC236}">
@@ -3461,66 +3574,6 @@
           </a:p>
         </p:txBody>
       </p:sp>
-      <p:pic>
-        <p:nvPicPr>
-          <p:cNvPr id="3" name="Picture 2">
-            <a:extLst>
-              <a:ext uri="{FF2B5EF4-FFF2-40B4-BE49-F238E27FC236}">
-                <a16:creationId xmlns:a16="http://schemas.microsoft.com/office/drawing/2014/main" id="{26641871-BA54-3112-5862-CF7EE9D8CFF7}"/>
-              </a:ext>
-            </a:extLst>
-          </p:cNvPr>
-          <p:cNvPicPr>
-            <a:picLocks noChangeAspect="1"/>
-          </p:cNvPicPr>
-          <p:nvPr/>
-        </p:nvPicPr>
-        <p:blipFill>
-          <a:blip r:embed="rId2"/>
-          <a:stretch>
-            <a:fillRect/>
-          </a:stretch>
-        </p:blipFill>
-        <p:spPr>
-          <a:xfrm>
-            <a:off x="78125" y="1677617"/>
-            <a:ext cx="3766673" cy="3502766"/>
-          </a:xfrm>
-          <a:prstGeom prst="rect">
-            <a:avLst/>
-          </a:prstGeom>
-        </p:spPr>
-      </p:pic>
-      <p:pic>
-        <p:nvPicPr>
-          <p:cNvPr id="6" name="Picture 5">
-            <a:extLst>
-              <a:ext uri="{FF2B5EF4-FFF2-40B4-BE49-F238E27FC236}">
-                <a16:creationId xmlns:a16="http://schemas.microsoft.com/office/drawing/2014/main" id="{A3EC6BC2-A1A6-D914-F442-1DDC64F9F142}"/>
-              </a:ext>
-            </a:extLst>
-          </p:cNvPr>
-          <p:cNvPicPr>
-            <a:picLocks noChangeAspect="1"/>
-          </p:cNvPicPr>
-          <p:nvPr/>
-        </p:nvPicPr>
-        <p:blipFill>
-          <a:blip r:embed="rId3"/>
-          <a:stretch>
-            <a:fillRect/>
-          </a:stretch>
-        </p:blipFill>
-        <p:spPr>
-          <a:xfrm>
-            <a:off x="3456433" y="3429000"/>
-            <a:ext cx="3898510" cy="3212967"/>
-          </a:xfrm>
-          <a:prstGeom prst="rect">
-            <a:avLst/>
-          </a:prstGeom>
-        </p:spPr>
-      </p:pic>
       <p:sp>
         <p:nvSpPr>
           <p:cNvPr id="2" name="TextBox 1">
@@ -3555,11 +3608,123 @@
                   <a:srgbClr val="FFC000"/>
                 </a:solidFill>
               </a:rPr>
-              <a:t>Draft: Report format will be worked on during 60 Day Path to Production.</a:t>
+              <a:t>Draft: Report format will be worked on during 60-day Path to Production.</a:t>
             </a:r>
           </a:p>
         </p:txBody>
       </p:sp>
+      <p:grpSp>
+        <p:nvGrpSpPr>
+          <p:cNvPr id="4" name="Group 3">
+            <a:extLst>
+              <a:ext uri="{FF2B5EF4-FFF2-40B4-BE49-F238E27FC236}">
+                <a16:creationId xmlns:a16="http://schemas.microsoft.com/office/drawing/2014/main" id="{BA5A59F8-B97E-D314-F116-EA9F4A47FBDD}"/>
+              </a:ext>
+            </a:extLst>
+          </p:cNvPr>
+          <p:cNvGrpSpPr/>
+          <p:nvPr/>
+        </p:nvGrpSpPr>
+        <p:grpSpPr>
+          <a:xfrm>
+            <a:off x="78125" y="1473200"/>
+            <a:ext cx="3862215" cy="4902200"/>
+            <a:chOff x="3394450" y="0"/>
+            <a:chExt cx="5403099" cy="6858000"/>
+          </a:xfrm>
+        </p:grpSpPr>
+        <p:pic>
+          <p:nvPicPr>
+            <p:cNvPr id="5" name="Picture 4">
+              <a:extLst>
+                <a:ext uri="{FF2B5EF4-FFF2-40B4-BE49-F238E27FC236}">
+                  <a16:creationId xmlns:a16="http://schemas.microsoft.com/office/drawing/2014/main" id="{38E62B6B-6BAC-3F27-8B3C-E05347C86161}"/>
+                </a:ext>
+              </a:extLst>
+            </p:cNvPr>
+            <p:cNvPicPr>
+              <a:picLocks noChangeAspect="1"/>
+            </p:cNvPicPr>
+            <p:nvPr/>
+          </p:nvPicPr>
+          <p:blipFill>
+            <a:blip r:embed="rId2"/>
+            <a:stretch>
+              <a:fillRect/>
+            </a:stretch>
+          </p:blipFill>
+          <p:spPr>
+            <a:xfrm>
+              <a:off x="3394450" y="0"/>
+              <a:ext cx="5403099" cy="6858000"/>
+            </a:xfrm>
+            <a:prstGeom prst="rect">
+              <a:avLst/>
+            </a:prstGeom>
+          </p:spPr>
+        </p:pic>
+        <p:pic>
+          <p:nvPicPr>
+            <p:cNvPr id="7" name="Picture 6">
+              <a:extLst>
+                <a:ext uri="{FF2B5EF4-FFF2-40B4-BE49-F238E27FC236}">
+                  <a16:creationId xmlns:a16="http://schemas.microsoft.com/office/drawing/2014/main" id="{572879D0-31F7-B50D-FE2A-410168D0FE16}"/>
+                </a:ext>
+              </a:extLst>
+            </p:cNvPr>
+            <p:cNvPicPr>
+              <a:picLocks noChangeAspect="1"/>
+            </p:cNvPicPr>
+            <p:nvPr/>
+          </p:nvPicPr>
+          <p:blipFill>
+            <a:blip r:embed="rId3"/>
+            <a:stretch>
+              <a:fillRect/>
+            </a:stretch>
+          </p:blipFill>
+          <p:spPr>
+            <a:xfrm>
+              <a:off x="4822228" y="355601"/>
+              <a:ext cx="2547543" cy="667416"/>
+            </a:xfrm>
+            <a:prstGeom prst="rect">
+              <a:avLst/>
+            </a:prstGeom>
+          </p:spPr>
+        </p:pic>
+      </p:grpSp>
+      <p:pic>
+        <p:nvPicPr>
+          <p:cNvPr id="12" name="Picture 11">
+            <a:extLst>
+              <a:ext uri="{FF2B5EF4-FFF2-40B4-BE49-F238E27FC236}">
+                <a16:creationId xmlns:a16="http://schemas.microsoft.com/office/drawing/2014/main" id="{9ECE81EA-A770-8461-B71D-830D6B8B35C8}"/>
+              </a:ext>
+            </a:extLst>
+          </p:cNvPr>
+          <p:cNvPicPr>
+            <a:picLocks noChangeAspect="1"/>
+          </p:cNvPicPr>
+          <p:nvPr/>
+        </p:nvPicPr>
+        <p:blipFill>
+          <a:blip r:embed="rId4"/>
+          <a:srcRect b="21353"/>
+          <a:stretch>
+            <a:fillRect/>
+          </a:stretch>
+        </p:blipFill>
+        <p:spPr>
+          <a:xfrm>
+            <a:off x="2919743" y="3035205"/>
+            <a:ext cx="3712641" cy="3695795"/>
+          </a:xfrm>
+          <a:prstGeom prst="rect">
+            <a:avLst/>
+          </a:prstGeom>
+        </p:spPr>
+      </p:pic>
     </p:spTree>
     <p:extLst>
       <p:ext uri="{BB962C8B-B14F-4D97-AF65-F5344CB8AC3E}">
@@ -3573,7 +3738,7 @@
 </p:sld>
 </file>
 
-<file path=ppt/slides/slide13.xml><?xml version="1.0" encoding="utf-8"?>
+<file path=ppt/slides/slide14.xml><?xml version="1.0" encoding="utf-8"?>
 <p:sld xmlns:a="http://schemas.openxmlformats.org/drawingml/2006/main" xmlns:r="http://schemas.openxmlformats.org/officeDocument/2006/relationships" xmlns:p="http://schemas.openxmlformats.org/presentationml/2006/main">
   <p:cSld>
     <p:spTree>
@@ -4022,7 +4187,7 @@
 </p:sld>
 </file>
 
-<file path=ppt/slides/slide14.xml><?xml version="1.0" encoding="utf-8"?>
+<file path=ppt/slides/slide15.xml><?xml version="1.0" encoding="utf-8"?>
 <p:sld xmlns:a="http://schemas.openxmlformats.org/drawingml/2006/main" xmlns:r="http://schemas.openxmlformats.org/officeDocument/2006/relationships" xmlns:p="http://schemas.openxmlformats.org/presentationml/2006/main">
   <p:cSld>
     <p:spTree>
@@ -4401,7 +4566,7 @@
 </p:sld>
 </file>
 
-<file path=ppt/slides/slide15.xml><?xml version="1.0" encoding="utf-8"?>
+<file path=ppt/slides/slide16.xml><?xml version="1.0" encoding="utf-8"?>
 <p:sld xmlns:a="http://schemas.openxmlformats.org/drawingml/2006/main" xmlns:r="http://schemas.openxmlformats.org/officeDocument/2006/relationships" xmlns:p="http://schemas.openxmlformats.org/presentationml/2006/main">
   <p:cSld>
     <p:spTree>
@@ -4658,7 +4823,7 @@
 </p:sld>
 </file>
 
-<file path=ppt/slides/slide16.xml><?xml version="1.0" encoding="utf-8"?>
+<file path=ppt/slides/slide17.xml><?xml version="1.0" encoding="utf-8"?>
 <p:sld xmlns:a="http://schemas.openxmlformats.org/drawingml/2006/main" xmlns:r="http://schemas.openxmlformats.org/officeDocument/2006/relationships" xmlns:p="http://schemas.openxmlformats.org/presentationml/2006/main">
   <p:cSld>
     <p:spTree>
@@ -4734,7 +4899,7 @@
 </p:sld>
 </file>
 
-<file path=ppt/slides/slide17.xml><?xml version="1.0" encoding="utf-8"?>
+<file path=ppt/slides/slide18.xml><?xml version="1.0" encoding="utf-8"?>
 <p:sld xmlns:a="http://schemas.openxmlformats.org/drawingml/2006/main" xmlns:r="http://schemas.openxmlformats.org/officeDocument/2006/relationships" xmlns:p="http://schemas.openxmlformats.org/presentationml/2006/main">
   <p:cSld>
     <p:spTree>
@@ -5001,7 +5166,7 @@
 </p:sld>
 </file>
 
-<file path=ppt/slides/slide18.xml><?xml version="1.0" encoding="utf-8"?>
+<file path=ppt/slides/slide19.xml><?xml version="1.0" encoding="utf-8"?>
 <p:sld xmlns:a="http://schemas.openxmlformats.org/drawingml/2006/main" xmlns:r="http://schemas.openxmlformats.org/officeDocument/2006/relationships" xmlns:p="http://schemas.openxmlformats.org/presentationml/2006/main">
   <p:cSld>
     <p:spTree>
@@ -5157,82 +5322,6 @@
     <p:extLst>
       <p:ext uri="{BB962C8B-B14F-4D97-AF65-F5344CB8AC3E}">
         <p14:creationId xmlns:p14="http://schemas.microsoft.com/office/powerpoint/2010/main" val="3078226758"/>
-      </p:ext>
-    </p:extLst>
-  </p:cSld>
-  <p:clrMapOvr>
-    <a:masterClrMapping/>
-  </p:clrMapOvr>
-</p:sld>
-</file>
-
-<file path=ppt/slides/slide19.xml><?xml version="1.0" encoding="utf-8"?>
-<p:sld xmlns:a="http://schemas.openxmlformats.org/drawingml/2006/main" xmlns:r="http://schemas.openxmlformats.org/officeDocument/2006/relationships" xmlns:p="http://schemas.openxmlformats.org/presentationml/2006/main">
-  <p:cSld>
-    <p:spTree>
-      <p:nvGrpSpPr>
-        <p:cNvPr id="1" name="">
-          <a:extLst>
-            <a:ext uri="{FF2B5EF4-FFF2-40B4-BE49-F238E27FC236}">
-              <a16:creationId xmlns:a16="http://schemas.microsoft.com/office/drawing/2014/main" id="{680E9B62-1D9A-7C87-A470-8B8AAC7C6BD1}"/>
-            </a:ext>
-          </a:extLst>
-        </p:cNvPr>
-        <p:cNvGrpSpPr/>
-        <p:nvPr/>
-      </p:nvGrpSpPr>
-      <p:grpSpPr>
-        <a:xfrm>
-          <a:off x="0" y="0"/>
-          <a:ext cx="0" cy="0"/>
-          <a:chOff x="0" y="0"/>
-          <a:chExt cx="0" cy="0"/>
-        </a:xfrm>
-      </p:grpSpPr>
-      <p:sp>
-        <p:nvSpPr>
-          <p:cNvPr id="2" name="TextBox 1">
-            <a:extLst>
-              <a:ext uri="{FF2B5EF4-FFF2-40B4-BE49-F238E27FC236}">
-                <a16:creationId xmlns:a16="http://schemas.microsoft.com/office/drawing/2014/main" id="{BF84745D-D4CE-6054-27DA-F6529BEC63C9}"/>
-              </a:ext>
-            </a:extLst>
-          </p:cNvPr>
-          <p:cNvSpPr txBox="1"/>
-          <p:nvPr/>
-        </p:nvSpPr>
-        <p:spPr>
-          <a:xfrm>
-            <a:off x="3970293" y="2563905"/>
-            <a:ext cx="4251421" cy="769441"/>
-          </a:xfrm>
-          <a:prstGeom prst="rect">
-            <a:avLst/>
-          </a:prstGeom>
-          <a:noFill/>
-        </p:spPr>
-        <p:txBody>
-          <a:bodyPr wrap="none" rtlCol="0">
-            <a:spAutoFit/>
-          </a:bodyPr>
-          <a:lstStyle/>
-          <a:p>
-            <a:pPr algn="ctr"/>
-            <a:r>
-              <a:rPr lang="en-US" sz="4400" dirty="0">
-                <a:solidFill>
-                  <a:schemeClr val="bg1"/>
-                </a:solidFill>
-              </a:rPr>
-              <a:t>The Architecture</a:t>
-            </a:r>
-          </a:p>
-        </p:txBody>
-      </p:sp>
-    </p:spTree>
-    <p:extLst>
-      <p:ext uri="{BB962C8B-B14F-4D97-AF65-F5344CB8AC3E}">
-        <p14:creationId xmlns:p14="http://schemas.microsoft.com/office/powerpoint/2010/main" val="4241221392"/>
       </p:ext>
     </p:extLst>
   </p:cSld>
@@ -6061,7 +6150,7 @@
           </a:prstGeom>
           <a:extLst>
             <a:ext uri="{C572A759-6A51-4108-AA02-DFA0A04FC94B}">
-              <ma14:wrappingTextBoxFlag xmlns="" xmlns:ma14="http://schemas.microsoft.com/office/mac/drawingml/2011/main" val="0"/>
+              <ma14:wrappingTextBoxFlag xmlns:ma14="http://schemas.microsoft.com/office/mac/drawingml/2011/main" xmlns="" val="0"/>
             </a:ext>
           </a:extLst>
         </p:spPr>
@@ -6098,6 +6187,82 @@
 </file>
 
 <file path=ppt/slides/slide20.xml><?xml version="1.0" encoding="utf-8"?>
+<p:sld xmlns:a="http://schemas.openxmlformats.org/drawingml/2006/main" xmlns:r="http://schemas.openxmlformats.org/officeDocument/2006/relationships" xmlns:p="http://schemas.openxmlformats.org/presentationml/2006/main">
+  <p:cSld>
+    <p:spTree>
+      <p:nvGrpSpPr>
+        <p:cNvPr id="1" name="">
+          <a:extLst>
+            <a:ext uri="{FF2B5EF4-FFF2-40B4-BE49-F238E27FC236}">
+              <a16:creationId xmlns:a16="http://schemas.microsoft.com/office/drawing/2014/main" id="{680E9B62-1D9A-7C87-A470-8B8AAC7C6BD1}"/>
+            </a:ext>
+          </a:extLst>
+        </p:cNvPr>
+        <p:cNvGrpSpPr/>
+        <p:nvPr/>
+      </p:nvGrpSpPr>
+      <p:grpSpPr>
+        <a:xfrm>
+          <a:off x="0" y="0"/>
+          <a:ext cx="0" cy="0"/>
+          <a:chOff x="0" y="0"/>
+          <a:chExt cx="0" cy="0"/>
+        </a:xfrm>
+      </p:grpSpPr>
+      <p:sp>
+        <p:nvSpPr>
+          <p:cNvPr id="2" name="TextBox 1">
+            <a:extLst>
+              <a:ext uri="{FF2B5EF4-FFF2-40B4-BE49-F238E27FC236}">
+                <a16:creationId xmlns:a16="http://schemas.microsoft.com/office/drawing/2014/main" id="{BF84745D-D4CE-6054-27DA-F6529BEC63C9}"/>
+              </a:ext>
+            </a:extLst>
+          </p:cNvPr>
+          <p:cNvSpPr txBox="1"/>
+          <p:nvPr/>
+        </p:nvSpPr>
+        <p:spPr>
+          <a:xfrm>
+            <a:off x="3970293" y="2563905"/>
+            <a:ext cx="4251421" cy="769441"/>
+          </a:xfrm>
+          <a:prstGeom prst="rect">
+            <a:avLst/>
+          </a:prstGeom>
+          <a:noFill/>
+        </p:spPr>
+        <p:txBody>
+          <a:bodyPr wrap="none" rtlCol="0">
+            <a:spAutoFit/>
+          </a:bodyPr>
+          <a:lstStyle/>
+          <a:p>
+            <a:pPr algn="ctr"/>
+            <a:r>
+              <a:rPr lang="en-US" sz="4400" dirty="0">
+                <a:solidFill>
+                  <a:schemeClr val="bg1"/>
+                </a:solidFill>
+              </a:rPr>
+              <a:t>The Architecture</a:t>
+            </a:r>
+          </a:p>
+        </p:txBody>
+      </p:sp>
+    </p:spTree>
+    <p:extLst>
+      <p:ext uri="{BB962C8B-B14F-4D97-AF65-F5344CB8AC3E}">
+        <p14:creationId xmlns:p14="http://schemas.microsoft.com/office/powerpoint/2010/main" val="4241221392"/>
+      </p:ext>
+    </p:extLst>
+  </p:cSld>
+  <p:clrMapOvr>
+    <a:masterClrMapping/>
+  </p:clrMapOvr>
+</p:sld>
+</file>
+
+<file path=ppt/slides/slide21.xml><?xml version="1.0" encoding="utf-8"?>
 <p:sld xmlns:a="http://schemas.openxmlformats.org/drawingml/2006/main" xmlns:r="http://schemas.openxmlformats.org/officeDocument/2006/relationships" xmlns:p="http://schemas.openxmlformats.org/presentationml/2006/main">
   <p:cSld>
     <p:spTree>
@@ -11164,7 +11329,7 @@
 </p:sld>
 </file>
 
-<file path=ppt/slides/slide21.xml><?xml version="1.0" encoding="utf-8"?>
+<file path=ppt/slides/slide22.xml><?xml version="1.0" encoding="utf-8"?>
 <p:sld xmlns:a="http://schemas.openxmlformats.org/drawingml/2006/main" xmlns:r="http://schemas.openxmlformats.org/officeDocument/2006/relationships" xmlns:p="http://schemas.openxmlformats.org/presentationml/2006/main">
   <p:cSld>
     <p:spTree>
@@ -17464,7 +17629,7 @@
 </p:sld>
 </file>
 
-<file path=ppt/slides/slide22.xml><?xml version="1.0" encoding="utf-8"?>
+<file path=ppt/slides/slide23.xml><?xml version="1.0" encoding="utf-8"?>
 <p:sld xmlns:a="http://schemas.openxmlformats.org/drawingml/2006/main" xmlns:r="http://schemas.openxmlformats.org/officeDocument/2006/relationships" xmlns:p="http://schemas.openxmlformats.org/presentationml/2006/main">
   <p:cSld>
     <p:spTree>
@@ -25576,7 +25741,7 @@
 </p:sld>
 </file>
 
-<file path=ppt/slides/slide23.xml><?xml version="1.0" encoding="utf-8"?>
+<file path=ppt/slides/slide24.xml><?xml version="1.0" encoding="utf-8"?>
 <p:sld xmlns:a="http://schemas.openxmlformats.org/drawingml/2006/main" xmlns:r="http://schemas.openxmlformats.org/officeDocument/2006/relationships" xmlns:p="http://schemas.openxmlformats.org/presentationml/2006/main">
   <p:cSld>
     <p:spTree>
@@ -25676,7 +25841,7 @@
 </p:sld>
 </file>
 
-<file path=ppt/slides/slide24.xml><?xml version="1.0" encoding="utf-8"?>
+<file path=ppt/slides/slide25.xml><?xml version="1.0" encoding="utf-8"?>
 <p:sld xmlns:a="http://schemas.openxmlformats.org/drawingml/2006/main" xmlns:r="http://schemas.openxmlformats.org/officeDocument/2006/relationships" xmlns:p="http://schemas.openxmlformats.org/presentationml/2006/main">
   <p:cSld name="Slide 4">
     <p:bg>
@@ -26643,7 +26808,7 @@
           </a:prstGeom>
           <a:extLst>
             <a:ext uri="{C572A759-6A51-4108-AA02-DFA0A04FC94B}">
-              <ma14:wrappingTextBoxFlag xmlns="" xmlns:ma14="http://schemas.microsoft.com/office/mac/drawingml/2011/main" val="0"/>
+              <ma14:wrappingTextBoxFlag xmlns:ma14="http://schemas.microsoft.com/office/mac/drawingml/2011/main" xmlns="" val="0"/>
             </a:ext>
           </a:extLst>
         </p:spPr>
@@ -26665,7 +26830,7 @@
             <a:pPr algn="l"/>
             <a:fld id="{F7021451-1387-4CA6-816F-3879F97B5CBC}" type="slidenum">
               <a:rPr lang="en-US" b="0"/>
-              <a:t>24</a:t>
+              <a:t>25</a:t>
             </a:fld>
             <a:endParaRPr lang="en-US"/>
           </a:p>
@@ -26679,7 +26844,7 @@
 </p:sld>
 </file>
 
-<file path=ppt/slides/slide25.xml><?xml version="1.0" encoding="utf-8"?>
+<file path=ppt/slides/slide26.xml><?xml version="1.0" encoding="utf-8"?>
 <p:sld xmlns:a="http://schemas.openxmlformats.org/drawingml/2006/main" xmlns:r="http://schemas.openxmlformats.org/officeDocument/2006/relationships" xmlns:p="http://schemas.openxmlformats.org/presentationml/2006/main">
   <p:cSld name="Slide 5">
     <p:bg>
@@ -27788,7 +27953,7 @@
           </a:prstGeom>
           <a:extLst>
             <a:ext uri="{C572A759-6A51-4108-AA02-DFA0A04FC94B}">
-              <ma14:wrappingTextBoxFlag xmlns="" xmlns:ma14="http://schemas.microsoft.com/office/mac/drawingml/2011/main" val="0"/>
+              <ma14:wrappingTextBoxFlag xmlns:ma14="http://schemas.microsoft.com/office/mac/drawingml/2011/main" xmlns="" val="0"/>
             </a:ext>
           </a:extLst>
         </p:spPr>
@@ -27810,7 +27975,7 @@
             <a:pPr algn="l"/>
             <a:fld id="{F7021451-1387-4CA6-816F-3879F97B5CBC}" type="slidenum">
               <a:rPr lang="en-US" b="0"/>
-              <a:t>25</a:t>
+              <a:t>26</a:t>
             </a:fld>
             <a:endParaRPr lang="en-US"/>
           </a:p>
@@ -27824,7 +27989,7 @@
 </p:sld>
 </file>
 
-<file path=ppt/slides/slide26.xml><?xml version="1.0" encoding="utf-8"?>
+<file path=ppt/slides/slide27.xml><?xml version="1.0" encoding="utf-8"?>
 <p:sld xmlns:a="http://schemas.openxmlformats.org/drawingml/2006/main" xmlns:r="http://schemas.openxmlformats.org/officeDocument/2006/relationships" xmlns:p="http://schemas.openxmlformats.org/presentationml/2006/main">
   <p:cSld name="Slide 6">
     <p:bg>
@@ -28971,7 +29136,7 @@
           </a:prstGeom>
           <a:extLst>
             <a:ext uri="{C572A759-6A51-4108-AA02-DFA0A04FC94B}">
-              <ma14:wrappingTextBoxFlag xmlns="" xmlns:ma14="http://schemas.microsoft.com/office/mac/drawingml/2011/main" val="0"/>
+              <ma14:wrappingTextBoxFlag xmlns:ma14="http://schemas.microsoft.com/office/mac/drawingml/2011/main" xmlns="" val="0"/>
             </a:ext>
           </a:extLst>
         </p:spPr>
@@ -28993,7 +29158,7 @@
             <a:pPr algn="l"/>
             <a:fld id="{F7021451-1387-4CA6-816F-3879F97B5CBC}" type="slidenum">
               <a:rPr lang="en-US" b="0"/>
-              <a:t>26</a:t>
+              <a:t>27</a:t>
             </a:fld>
             <a:endParaRPr lang="en-US"/>
           </a:p>
@@ -29007,7 +29172,7 @@
 </p:sld>
 </file>
 
-<file path=ppt/slides/slide27.xml><?xml version="1.0" encoding="utf-8"?>
+<file path=ppt/slides/slide28.xml><?xml version="1.0" encoding="utf-8"?>
 <p:sld xmlns:a="http://schemas.openxmlformats.org/drawingml/2006/main" xmlns:r="http://schemas.openxmlformats.org/officeDocument/2006/relationships" xmlns:p="http://schemas.openxmlformats.org/presentationml/2006/main">
   <p:cSld name="Slide 7">
     <p:bg>
@@ -29726,7 +29891,7 @@
           </a:prstGeom>
           <a:extLst>
             <a:ext uri="{C572A759-6A51-4108-AA02-DFA0A04FC94B}">
-              <ma14:wrappingTextBoxFlag xmlns="" xmlns:ma14="http://schemas.microsoft.com/office/mac/drawingml/2011/main" val="0"/>
+              <ma14:wrappingTextBoxFlag xmlns:ma14="http://schemas.microsoft.com/office/mac/drawingml/2011/main" xmlns="" val="0"/>
             </a:ext>
           </a:extLst>
         </p:spPr>
@@ -29748,7 +29913,7 @@
             <a:pPr algn="l"/>
             <a:fld id="{F7021451-1387-4CA6-816F-3879F97B5CBC}" type="slidenum">
               <a:rPr lang="en-US" b="0"/>
-              <a:t>27</a:t>
+              <a:t>28</a:t>
             </a:fld>
             <a:endParaRPr lang="en-US"/>
           </a:p>
@@ -29762,7 +29927,7 @@
 </p:sld>
 </file>
 
-<file path=ppt/slides/slide28.xml><?xml version="1.0" encoding="utf-8"?>
+<file path=ppt/slides/slide29.xml><?xml version="1.0" encoding="utf-8"?>
 <p:sld xmlns:a="http://schemas.openxmlformats.org/drawingml/2006/main" xmlns:r="http://schemas.openxmlformats.org/officeDocument/2006/relationships" xmlns:p="http://schemas.openxmlformats.org/presentationml/2006/main">
   <p:cSld name="Slide 8">
     <p:bg>
@@ -30734,7 +30899,7 @@
           </a:prstGeom>
           <a:extLst>
             <a:ext uri="{C572A759-6A51-4108-AA02-DFA0A04FC94B}">
-              <ma14:wrappingTextBoxFlag xmlns="" xmlns:ma14="http://schemas.microsoft.com/office/mac/drawingml/2011/main" val="0"/>
+              <ma14:wrappingTextBoxFlag xmlns:ma14="http://schemas.microsoft.com/office/mac/drawingml/2011/main" xmlns="" val="0"/>
             </a:ext>
           </a:extLst>
         </p:spPr>
@@ -30756,7 +30921,7 @@
             <a:pPr algn="l"/>
             <a:fld id="{F7021451-1387-4CA6-816F-3879F97B5CBC}" type="slidenum">
               <a:rPr lang="en-US" b="0"/>
-              <a:t>28</a:t>
+              <a:t>29</a:t>
             </a:fld>
             <a:endParaRPr lang="en-US"/>
           </a:p>
@@ -30907,943 +31072,6 @@
               </a:rPr>
               <a:t>Infrastructure only: LLM costs must be determined; cost and output will vary based on LLMs used.</a:t>
             </a:r>
-          </a:p>
-        </p:txBody>
-      </p:sp>
-    </p:spTree>
-  </p:cSld>
-  <p:clrMapOvr>
-    <a:masterClrMapping/>
-  </p:clrMapOvr>
-</p:sld>
-</file>
-
-<file path=ppt/slides/slide29.xml><?xml version="1.0" encoding="utf-8"?>
-<p:sld xmlns:a="http://schemas.openxmlformats.org/drawingml/2006/main" xmlns:r="http://schemas.openxmlformats.org/officeDocument/2006/relationships" xmlns:p="http://schemas.openxmlformats.org/presentationml/2006/main">
-  <p:cSld name="Slide 9">
-    <p:bg>
-      <p:bgPr>
-        <a:solidFill>
-          <a:srgbClr val="000000"/>
-        </a:solidFill>
-        <a:effectLst/>
-      </p:bgPr>
-    </p:bg>
-    <p:spTree>
-      <p:nvGrpSpPr>
-        <p:cNvPr id="1" name=""/>
-        <p:cNvGrpSpPr/>
-        <p:nvPr/>
-      </p:nvGrpSpPr>
-      <p:grpSpPr>
-        <a:xfrm>
-          <a:off x="0" y="0"/>
-          <a:ext cx="0" cy="0"/>
-          <a:chOff x="0" y="0"/>
-          <a:chExt cx="0" cy="0"/>
-        </a:xfrm>
-      </p:grpSpPr>
-      <p:sp>
-        <p:nvSpPr>
-          <p:cNvPr id="2" name="Text 0"/>
-          <p:cNvSpPr/>
-          <p:nvPr/>
-        </p:nvSpPr>
-        <p:spPr>
-          <a:xfrm>
-            <a:off x="566928" y="384048"/>
-            <a:ext cx="7589520" cy="219456"/>
-          </a:xfrm>
-          <a:prstGeom prst="rect">
-            <a:avLst/>
-          </a:prstGeom>
-          <a:noFill/>
-          <a:ln/>
-        </p:spPr>
-        <p:txBody>
-          <a:bodyPr wrap="square" lIns="0" tIns="0" rIns="0" bIns="0" rtlCol="0" anchor="ctr"/>
-          <a:lstStyle/>
-          <a:p>
-            <a:pPr marL="0" indent="0">
-              <a:buNone/>
-            </a:pPr>
-            <a:r>
-              <a:rPr lang="en-US" sz="850" b="1" dirty="0">
-                <a:solidFill>
-                  <a:srgbClr val="59C4FF"/>
-                </a:solidFill>
-              </a:rPr>
-              <a:t>COST DECISION</a:t>
-            </a:r>
-            <a:endParaRPr lang="en-US" sz="850" dirty="0"/>
-          </a:p>
-        </p:txBody>
-      </p:sp>
-      <p:sp>
-        <p:nvSpPr>
-          <p:cNvPr id="3" name="Text 1"/>
-          <p:cNvSpPr/>
-          <p:nvPr/>
-        </p:nvSpPr>
-        <p:spPr>
-          <a:xfrm>
-            <a:off x="530352" y="658368"/>
-            <a:ext cx="10927080" cy="493776"/>
-          </a:xfrm>
-          <a:prstGeom prst="rect">
-            <a:avLst/>
-          </a:prstGeom>
-          <a:noFill/>
-          <a:ln/>
-        </p:spPr>
-        <p:txBody>
-          <a:bodyPr wrap="square" lIns="0" tIns="0" rIns="0" bIns="0" rtlCol="0" anchor="ctr">
-            <a:normAutofit/>
-          </a:bodyPr>
-          <a:lstStyle/>
-          <a:p>
-            <a:pPr marL="0" indent="0">
-              <a:buNone/>
-            </a:pPr>
-            <a:r>
-              <a:rPr lang="en-US" sz="2950" b="1" dirty="0">
-                <a:solidFill>
-                  <a:srgbClr val="F5F7FA"/>
-                </a:solidFill>
-              </a:rPr>
-              <a:t>S3 as the first vector store is the right kind of cheap</a:t>
-            </a:r>
-            <a:endParaRPr lang="en-US" sz="2950" dirty="0"/>
-          </a:p>
-        </p:txBody>
-      </p:sp>
-      <p:sp>
-        <p:nvSpPr>
-          <p:cNvPr id="4" name="Text 2"/>
-          <p:cNvSpPr/>
-          <p:nvPr/>
-        </p:nvSpPr>
-        <p:spPr>
-          <a:xfrm>
-            <a:off x="621792" y="1325880"/>
-            <a:ext cx="10216537" cy="713232"/>
-          </a:xfrm>
-          <a:prstGeom prst="rect">
-            <a:avLst/>
-          </a:prstGeom>
-          <a:noFill/>
-          <a:ln/>
-        </p:spPr>
-        <p:txBody>
-          <a:bodyPr wrap="square" lIns="254" tIns="254" rIns="254" bIns="254" rtlCol="0" anchor="t">
-            <a:normAutofit/>
-          </a:bodyPr>
-          <a:lstStyle/>
-          <a:p>
-            <a:pPr marL="0" indent="0" algn="l">
-              <a:buNone/>
-            </a:pPr>
-            <a:r>
-              <a:rPr lang="en-US" sz="1600" dirty="0">
-                <a:solidFill>
-                  <a:srgbClr val="B2BAC8"/>
-                </a:solidFill>
-              </a:rPr>
-              <a:t>This is one of those choices where CTO discipline matters. For the MVP, S3 is not the “best vector database.” It is the best way to avoid paying for one before the workload proves it deserves one; it is </a:t>
-            </a:r>
-            <a:r>
-              <a:rPr lang="en-US" sz="1600" b="1" dirty="0">
-                <a:solidFill>
-                  <a:srgbClr val="B2BAC8"/>
-                </a:solidFill>
-              </a:rPr>
-              <a:t>fit to purpose </a:t>
-            </a:r>
-            <a:r>
-              <a:rPr lang="en-US" sz="1600" dirty="0">
-                <a:solidFill>
-                  <a:srgbClr val="B2BAC8"/>
-                </a:solidFill>
-              </a:rPr>
-              <a:t>engineering.</a:t>
-            </a:r>
-            <a:endParaRPr lang="en-US" sz="1600" dirty="0"/>
-          </a:p>
-        </p:txBody>
-      </p:sp>
-      <p:sp>
-        <p:nvSpPr>
-          <p:cNvPr id="5" name="Text 3"/>
-          <p:cNvSpPr/>
-          <p:nvPr/>
-        </p:nvSpPr>
-        <p:spPr>
-          <a:xfrm>
-            <a:off x="2924285" y="2395728"/>
-            <a:ext cx="2743200" cy="310896"/>
-          </a:xfrm>
-          <a:prstGeom prst="rect">
-            <a:avLst/>
-          </a:prstGeom>
-          <a:noFill/>
-          <a:ln/>
-        </p:spPr>
-        <p:txBody>
-          <a:bodyPr wrap="square" lIns="254" tIns="254" rIns="254" bIns="254" rtlCol="0" anchor="t">
-            <a:normAutofit/>
-          </a:bodyPr>
-          <a:lstStyle/>
-          <a:p>
-            <a:pPr marL="0" indent="0" algn="ctr">
-              <a:buNone/>
-            </a:pPr>
-            <a:r>
-              <a:rPr lang="en-US" sz="1400" b="1" dirty="0">
-                <a:solidFill>
-                  <a:srgbClr val="59C4FF"/>
-                </a:solidFill>
-              </a:rPr>
-              <a:t>S3 JSON embeddings</a:t>
-            </a:r>
-            <a:endParaRPr lang="en-US" sz="1400" dirty="0"/>
-          </a:p>
-        </p:txBody>
-      </p:sp>
-      <p:sp>
-        <p:nvSpPr>
-          <p:cNvPr id="6" name="Text 4"/>
-          <p:cNvSpPr/>
-          <p:nvPr/>
-        </p:nvSpPr>
-        <p:spPr>
-          <a:xfrm>
-            <a:off x="6873238" y="2395728"/>
-            <a:ext cx="3063240" cy="310896"/>
-          </a:xfrm>
-          <a:prstGeom prst="rect">
-            <a:avLst/>
-          </a:prstGeom>
-          <a:noFill/>
-          <a:ln/>
-        </p:spPr>
-        <p:txBody>
-          <a:bodyPr wrap="square" lIns="254" tIns="254" rIns="254" bIns="254" rtlCol="0" anchor="t">
-            <a:normAutofit/>
-          </a:bodyPr>
-          <a:lstStyle/>
-          <a:p>
-            <a:pPr marL="0" indent="0" algn="ctr">
-              <a:buNone/>
-            </a:pPr>
-            <a:r>
-              <a:rPr lang="en-US" sz="1400" b="1" dirty="0">
-                <a:solidFill>
-                  <a:srgbClr val="FFD65A"/>
-                </a:solidFill>
-              </a:rPr>
-              <a:t>OpenSearch Serverless / pgvector</a:t>
-            </a:r>
-            <a:endParaRPr lang="en-US" sz="1400" dirty="0"/>
-          </a:p>
-        </p:txBody>
-      </p:sp>
-      <p:sp>
-        <p:nvSpPr>
-          <p:cNvPr id="7" name="Text 5"/>
-          <p:cNvSpPr/>
-          <p:nvPr/>
-        </p:nvSpPr>
-        <p:spPr>
-          <a:xfrm>
-            <a:off x="1235335" y="2834640"/>
-            <a:ext cx="1508760" cy="347472"/>
-          </a:xfrm>
-          <a:prstGeom prst="roundRect">
-            <a:avLst>
-              <a:gd name="adj" fmla="val 13158"/>
-            </a:avLst>
-          </a:prstGeom>
-          <a:solidFill>
-            <a:srgbClr val="1C2430"/>
-          </a:solidFill>
-          <a:ln>
-            <a:solidFill>
-              <a:srgbClr val="1C2430">
-                <a:alpha val="0"/>
-              </a:srgbClr>
-            </a:solidFill>
-          </a:ln>
-        </p:spPr>
-        <p:txBody>
-          <a:bodyPr wrap="square" lIns="635" tIns="635" rIns="635" bIns="635" rtlCol="0" anchor="ctr">
-            <a:normAutofit/>
-          </a:bodyPr>
-          <a:lstStyle/>
-          <a:p>
-            <a:pPr marL="0" indent="0" algn="ctr">
-              <a:buNone/>
-            </a:pPr>
-            <a:r>
-              <a:rPr lang="en-US" sz="950" b="1" dirty="0">
-                <a:solidFill>
-                  <a:srgbClr val="B2BAC8"/>
-                </a:solidFill>
-              </a:rPr>
-              <a:t>Idle cost</a:t>
-            </a:r>
-            <a:endParaRPr lang="en-US" sz="950" dirty="0"/>
-          </a:p>
-        </p:txBody>
-      </p:sp>
-      <p:sp>
-        <p:nvSpPr>
-          <p:cNvPr id="8" name="Text 6"/>
-          <p:cNvSpPr/>
-          <p:nvPr/>
-        </p:nvSpPr>
-        <p:spPr>
-          <a:xfrm>
-            <a:off x="2862967" y="2779776"/>
-            <a:ext cx="2743200" cy="457200"/>
-          </a:xfrm>
-          <a:prstGeom prst="roundRect">
-            <a:avLst>
-              <a:gd name="adj" fmla="val 16000"/>
-            </a:avLst>
-          </a:prstGeom>
-          <a:solidFill>
-            <a:srgbClr val="071A2D"/>
-          </a:solidFill>
-          <a:ln w="13970">
-            <a:solidFill>
-              <a:srgbClr val="2F9BFF"/>
-            </a:solidFill>
-          </a:ln>
-        </p:spPr>
-        <p:txBody>
-          <a:bodyPr wrap="square" lIns="1016" tIns="1016" rIns="1016" bIns="1016" rtlCol="0" anchor="ctr">
-            <a:normAutofit/>
-          </a:bodyPr>
-          <a:lstStyle/>
-          <a:p>
-            <a:pPr marL="0" indent="0" algn="ctr">
-              <a:buNone/>
-            </a:pPr>
-            <a:r>
-              <a:rPr lang="en-US" sz="1080" dirty="0">
-                <a:solidFill>
-                  <a:srgbClr val="F5F7FA"/>
-                </a:solidFill>
-              </a:rPr>
-              <a:t>$0 storage only</a:t>
-            </a:r>
-            <a:endParaRPr lang="en-US" sz="1080" dirty="0"/>
-          </a:p>
-        </p:txBody>
-      </p:sp>
-      <p:sp>
-        <p:nvSpPr>
-          <p:cNvPr id="9" name="Text 7"/>
-          <p:cNvSpPr/>
-          <p:nvPr/>
-        </p:nvSpPr>
-        <p:spPr>
-          <a:xfrm>
-            <a:off x="6840607" y="2779776"/>
-            <a:ext cx="3154680" cy="457200"/>
-          </a:xfrm>
-          <a:prstGeom prst="roundRect">
-            <a:avLst>
-              <a:gd name="adj" fmla="val 16000"/>
-            </a:avLst>
-          </a:prstGeom>
-          <a:solidFill>
-            <a:srgbClr val="071A2D"/>
-          </a:solidFill>
-          <a:ln w="13970">
-            <a:solidFill>
-              <a:srgbClr val="FFD65A"/>
-            </a:solidFill>
-          </a:ln>
-        </p:spPr>
-        <p:txBody>
-          <a:bodyPr wrap="square" lIns="1016" tIns="1016" rIns="1016" bIns="1016" rtlCol="0" anchor="ctr">
-            <a:normAutofit/>
-          </a:bodyPr>
-          <a:lstStyle/>
-          <a:p>
-            <a:pPr marL="0" indent="0" algn="ctr">
-              <a:buNone/>
-            </a:pPr>
-            <a:r>
-              <a:rPr lang="en-US" sz="1080" dirty="0">
-                <a:solidFill>
-                  <a:srgbClr val="F5F7FA"/>
-                </a:solidFill>
-              </a:rPr>
-              <a:t>~$175/month minimum</a:t>
-            </a:r>
-            <a:endParaRPr lang="en-US" sz="1080" dirty="0"/>
-          </a:p>
-        </p:txBody>
-      </p:sp>
-      <p:sp>
-        <p:nvSpPr>
-          <p:cNvPr id="10" name="Text 8"/>
-          <p:cNvSpPr/>
-          <p:nvPr/>
-        </p:nvSpPr>
-        <p:spPr>
-          <a:xfrm>
-            <a:off x="1235335" y="3493008"/>
-            <a:ext cx="1508760" cy="347472"/>
-          </a:xfrm>
-          <a:prstGeom prst="roundRect">
-            <a:avLst>
-              <a:gd name="adj" fmla="val 13158"/>
-            </a:avLst>
-          </a:prstGeom>
-          <a:solidFill>
-            <a:srgbClr val="1C2430"/>
-          </a:solidFill>
-          <a:ln>
-            <a:solidFill>
-              <a:srgbClr val="1C2430">
-                <a:alpha val="0"/>
-              </a:srgbClr>
-            </a:solidFill>
-          </a:ln>
-        </p:spPr>
-        <p:txBody>
-          <a:bodyPr wrap="square" lIns="635" tIns="635" rIns="635" bIns="635" rtlCol="0" anchor="ctr">
-            <a:normAutofit/>
-          </a:bodyPr>
-          <a:lstStyle/>
-          <a:p>
-            <a:pPr marL="0" indent="0" algn="ctr">
-              <a:buNone/>
-            </a:pPr>
-            <a:r>
-              <a:rPr lang="en-US" sz="950" b="1" dirty="0">
-                <a:solidFill>
-                  <a:srgbClr val="B2BAC8"/>
-                </a:solidFill>
-              </a:rPr>
-              <a:t>Read pattern</a:t>
-            </a:r>
-            <a:endParaRPr lang="en-US" sz="950" dirty="0"/>
-          </a:p>
-        </p:txBody>
-      </p:sp>
-      <p:sp>
-        <p:nvSpPr>
-          <p:cNvPr id="11" name="Text 9"/>
-          <p:cNvSpPr/>
-          <p:nvPr/>
-        </p:nvSpPr>
-        <p:spPr>
-          <a:xfrm>
-            <a:off x="2862967" y="3438144"/>
-            <a:ext cx="2743200" cy="457200"/>
-          </a:xfrm>
-          <a:prstGeom prst="roundRect">
-            <a:avLst>
-              <a:gd name="adj" fmla="val 16000"/>
-            </a:avLst>
-          </a:prstGeom>
-          <a:solidFill>
-            <a:srgbClr val="071A2D"/>
-          </a:solidFill>
-          <a:ln w="13970">
-            <a:solidFill>
-              <a:srgbClr val="2F9BFF"/>
-            </a:solidFill>
-          </a:ln>
-        </p:spPr>
-        <p:txBody>
-          <a:bodyPr wrap="square" lIns="1016" tIns="1016" rIns="1016" bIns="1016" rtlCol="0" anchor="ctr">
-            <a:normAutofit/>
-          </a:bodyPr>
-          <a:lstStyle/>
-          <a:p>
-            <a:pPr marL="0" indent="0" algn="ctr">
-              <a:buNone/>
-            </a:pPr>
-            <a:r>
-              <a:rPr lang="en-US" sz="1080" dirty="0">
-                <a:solidFill>
-                  <a:srgbClr val="F5F7FA"/>
-                </a:solidFill>
-              </a:rPr>
-              <a:t>Per-submission retrieval</a:t>
-            </a:r>
-            <a:endParaRPr lang="en-US" sz="1080" dirty="0"/>
-          </a:p>
-        </p:txBody>
-      </p:sp>
-      <p:sp>
-        <p:nvSpPr>
-          <p:cNvPr id="12" name="Text 10"/>
-          <p:cNvSpPr/>
-          <p:nvPr/>
-        </p:nvSpPr>
-        <p:spPr>
-          <a:xfrm>
-            <a:off x="6840607" y="3438144"/>
-            <a:ext cx="3154680" cy="457200"/>
-          </a:xfrm>
-          <a:prstGeom prst="roundRect">
-            <a:avLst>
-              <a:gd name="adj" fmla="val 16000"/>
-            </a:avLst>
-          </a:prstGeom>
-          <a:solidFill>
-            <a:srgbClr val="071A2D"/>
-          </a:solidFill>
-          <a:ln w="13970">
-            <a:solidFill>
-              <a:srgbClr val="FFD65A"/>
-            </a:solidFill>
-          </a:ln>
-        </p:spPr>
-        <p:txBody>
-          <a:bodyPr wrap="square" lIns="1016" tIns="1016" rIns="1016" bIns="1016" rtlCol="0" anchor="ctr">
-            <a:normAutofit/>
-          </a:bodyPr>
-          <a:lstStyle/>
-          <a:p>
-            <a:pPr marL="0" indent="0" algn="ctr">
-              <a:buNone/>
-            </a:pPr>
-            <a:r>
-              <a:rPr lang="en-US" sz="1080" dirty="0">
-                <a:solidFill>
-                  <a:srgbClr val="F5F7FA"/>
-                </a:solidFill>
-              </a:rPr>
-              <a:t>Similarity search across corpora</a:t>
-            </a:r>
-            <a:endParaRPr lang="en-US" sz="1080" dirty="0"/>
-          </a:p>
-        </p:txBody>
-      </p:sp>
-      <p:sp>
-        <p:nvSpPr>
-          <p:cNvPr id="13" name="Text 11"/>
-          <p:cNvSpPr/>
-          <p:nvPr/>
-        </p:nvSpPr>
-        <p:spPr>
-          <a:xfrm>
-            <a:off x="1235335" y="4151376"/>
-            <a:ext cx="1508760" cy="347472"/>
-          </a:xfrm>
-          <a:prstGeom prst="roundRect">
-            <a:avLst>
-              <a:gd name="adj" fmla="val 13158"/>
-            </a:avLst>
-          </a:prstGeom>
-          <a:solidFill>
-            <a:srgbClr val="1C2430"/>
-          </a:solidFill>
-          <a:ln>
-            <a:solidFill>
-              <a:srgbClr val="1C2430">
-                <a:alpha val="0"/>
-              </a:srgbClr>
-            </a:solidFill>
-          </a:ln>
-        </p:spPr>
-        <p:txBody>
-          <a:bodyPr wrap="square" lIns="635" tIns="635" rIns="635" bIns="635" rtlCol="0" anchor="ctr">
-            <a:normAutofit/>
-          </a:bodyPr>
-          <a:lstStyle/>
-          <a:p>
-            <a:pPr marL="0" indent="0" algn="ctr">
-              <a:buNone/>
-            </a:pPr>
-            <a:r>
-              <a:rPr lang="en-US" sz="950" b="1" dirty="0">
-                <a:solidFill>
-                  <a:srgbClr val="B2BAC8"/>
-                </a:solidFill>
-              </a:rPr>
-              <a:t>Latency</a:t>
-            </a:r>
-            <a:endParaRPr lang="en-US" sz="950" dirty="0"/>
-          </a:p>
-        </p:txBody>
-      </p:sp>
-      <p:sp>
-        <p:nvSpPr>
-          <p:cNvPr id="14" name="Text 12"/>
-          <p:cNvSpPr/>
-          <p:nvPr/>
-        </p:nvSpPr>
-        <p:spPr>
-          <a:xfrm>
-            <a:off x="2862967" y="4096512"/>
-            <a:ext cx="2743200" cy="457200"/>
-          </a:xfrm>
-          <a:prstGeom prst="roundRect">
-            <a:avLst>
-              <a:gd name="adj" fmla="val 16000"/>
-            </a:avLst>
-          </a:prstGeom>
-          <a:solidFill>
-            <a:srgbClr val="071A2D"/>
-          </a:solidFill>
-          <a:ln w="13970">
-            <a:solidFill>
-              <a:srgbClr val="2F9BFF"/>
-            </a:solidFill>
-          </a:ln>
-        </p:spPr>
-        <p:txBody>
-          <a:bodyPr wrap="square" lIns="1016" tIns="1016" rIns="1016" bIns="1016" rtlCol="0" anchor="ctr">
-            <a:normAutofit/>
-          </a:bodyPr>
-          <a:lstStyle/>
-          <a:p>
-            <a:pPr marL="0" indent="0" algn="ctr">
-              <a:buNone/>
-            </a:pPr>
-            <a:r>
-              <a:rPr lang="en-US" sz="1080" dirty="0">
-                <a:solidFill>
-                  <a:srgbClr val="F5F7FA"/>
-                </a:solidFill>
-              </a:rPr>
-              <a:t>~50-100 </a:t>
-            </a:r>
-            <a:r>
-              <a:rPr lang="en-US" sz="1080" dirty="0" err="1">
-                <a:solidFill>
-                  <a:srgbClr val="F5F7FA"/>
-                </a:solidFill>
-              </a:rPr>
-              <a:t>ms</a:t>
-            </a:r>
-            <a:endParaRPr lang="en-US" sz="1080" dirty="0"/>
-          </a:p>
-        </p:txBody>
-      </p:sp>
-      <p:sp>
-        <p:nvSpPr>
-          <p:cNvPr id="15" name="Text 13"/>
-          <p:cNvSpPr/>
-          <p:nvPr/>
-        </p:nvSpPr>
-        <p:spPr>
-          <a:xfrm>
-            <a:off x="6840607" y="4096512"/>
-            <a:ext cx="3154680" cy="457200"/>
-          </a:xfrm>
-          <a:prstGeom prst="roundRect">
-            <a:avLst>
-              <a:gd name="adj" fmla="val 16000"/>
-            </a:avLst>
-          </a:prstGeom>
-          <a:solidFill>
-            <a:srgbClr val="071A2D"/>
-          </a:solidFill>
-          <a:ln w="13970">
-            <a:solidFill>
-              <a:srgbClr val="FFD65A"/>
-            </a:solidFill>
-          </a:ln>
-        </p:spPr>
-        <p:txBody>
-          <a:bodyPr wrap="square" lIns="1016" tIns="1016" rIns="1016" bIns="1016" rtlCol="0" anchor="ctr">
-            <a:normAutofit/>
-          </a:bodyPr>
-          <a:lstStyle/>
-          <a:p>
-            <a:pPr marL="0" indent="0" algn="ctr">
-              <a:buNone/>
-            </a:pPr>
-            <a:r>
-              <a:rPr lang="en-US" sz="1080" dirty="0">
-                <a:solidFill>
-                  <a:srgbClr val="F5F7FA"/>
-                </a:solidFill>
-              </a:rPr>
-              <a:t>~10 ms query path</a:t>
-            </a:r>
-            <a:endParaRPr lang="en-US" sz="1080" dirty="0"/>
-          </a:p>
-        </p:txBody>
-      </p:sp>
-      <p:sp>
-        <p:nvSpPr>
-          <p:cNvPr id="16" name="Text 14"/>
-          <p:cNvSpPr/>
-          <p:nvPr/>
-        </p:nvSpPr>
-        <p:spPr>
-          <a:xfrm>
-            <a:off x="1235335" y="4809744"/>
-            <a:ext cx="1508760" cy="347472"/>
-          </a:xfrm>
-          <a:prstGeom prst="roundRect">
-            <a:avLst>
-              <a:gd name="adj" fmla="val 13158"/>
-            </a:avLst>
-          </a:prstGeom>
-          <a:solidFill>
-            <a:srgbClr val="1C2430"/>
-          </a:solidFill>
-          <a:ln>
-            <a:solidFill>
-              <a:srgbClr val="1C2430">
-                <a:alpha val="0"/>
-              </a:srgbClr>
-            </a:solidFill>
-          </a:ln>
-        </p:spPr>
-        <p:txBody>
-          <a:bodyPr wrap="square" lIns="635" tIns="635" rIns="635" bIns="635" rtlCol="0" anchor="ctr">
-            <a:normAutofit/>
-          </a:bodyPr>
-          <a:lstStyle/>
-          <a:p>
-            <a:pPr marL="0" indent="0" algn="ctr">
-              <a:buNone/>
-            </a:pPr>
-            <a:r>
-              <a:rPr lang="en-US" sz="950" b="1" dirty="0">
-                <a:solidFill>
-                  <a:srgbClr val="B2BAC8"/>
-                </a:solidFill>
-              </a:rPr>
-              <a:t>Move when</a:t>
-            </a:r>
-            <a:endParaRPr lang="en-US" sz="950" dirty="0"/>
-          </a:p>
-        </p:txBody>
-      </p:sp>
-      <p:sp>
-        <p:nvSpPr>
-          <p:cNvPr id="17" name="Text 15"/>
-          <p:cNvSpPr/>
-          <p:nvPr/>
-        </p:nvSpPr>
-        <p:spPr>
-          <a:xfrm>
-            <a:off x="2862967" y="4754880"/>
-            <a:ext cx="2743200" cy="457200"/>
-          </a:xfrm>
-          <a:prstGeom prst="roundRect">
-            <a:avLst>
-              <a:gd name="adj" fmla="val 16000"/>
-            </a:avLst>
-          </a:prstGeom>
-          <a:solidFill>
-            <a:srgbClr val="071A2D"/>
-          </a:solidFill>
-          <a:ln w="13970">
-            <a:solidFill>
-              <a:srgbClr val="2F9BFF"/>
-            </a:solidFill>
-          </a:ln>
-        </p:spPr>
-        <p:txBody>
-          <a:bodyPr wrap="square" lIns="1016" tIns="1016" rIns="1016" bIns="1016" rtlCol="0" anchor="ctr">
-            <a:normAutofit/>
-          </a:bodyPr>
-          <a:lstStyle/>
-          <a:p>
-            <a:pPr marL="0" indent="0" algn="ctr">
-              <a:buNone/>
-            </a:pPr>
-            <a:r>
-              <a:rPr lang="en-US" sz="1080" dirty="0">
-                <a:solidFill>
-                  <a:srgbClr val="F5F7FA"/>
-                </a:solidFill>
-              </a:rPr>
-              <a:t>MVP and variable load</a:t>
-            </a:r>
-            <a:endParaRPr lang="en-US" sz="1080" dirty="0"/>
-          </a:p>
-        </p:txBody>
-      </p:sp>
-      <p:sp>
-        <p:nvSpPr>
-          <p:cNvPr id="18" name="Text 16"/>
-          <p:cNvSpPr/>
-          <p:nvPr/>
-        </p:nvSpPr>
-        <p:spPr>
-          <a:xfrm>
-            <a:off x="6840607" y="4754880"/>
-            <a:ext cx="3154680" cy="457200"/>
-          </a:xfrm>
-          <a:prstGeom prst="roundRect">
-            <a:avLst>
-              <a:gd name="adj" fmla="val 16000"/>
-            </a:avLst>
-          </a:prstGeom>
-          <a:solidFill>
-            <a:srgbClr val="071A2D"/>
-          </a:solidFill>
-          <a:ln w="13970">
-            <a:solidFill>
-              <a:srgbClr val="FFD65A"/>
-            </a:solidFill>
-          </a:ln>
-        </p:spPr>
-        <p:txBody>
-          <a:bodyPr wrap="square" lIns="1016" tIns="1016" rIns="1016" bIns="1016" rtlCol="0" anchor="ctr">
-            <a:normAutofit/>
-          </a:bodyPr>
-          <a:lstStyle/>
-          <a:p>
-            <a:pPr marL="0" indent="0" algn="ctr">
-              <a:buNone/>
-            </a:pPr>
-            <a:r>
-              <a:rPr lang="en-US" sz="1080" dirty="0">
-                <a:solidFill>
-                  <a:srgbClr val="F5F7FA"/>
-                </a:solidFill>
-              </a:rPr>
-              <a:t>&gt;50K presentations/month or cross-submission search</a:t>
-            </a:r>
-            <a:endParaRPr lang="en-US" sz="1080" dirty="0"/>
-          </a:p>
-        </p:txBody>
-      </p:sp>
-      <p:sp>
-        <p:nvSpPr>
-          <p:cNvPr id="19" name="Text 17"/>
-          <p:cNvSpPr/>
-          <p:nvPr/>
-        </p:nvSpPr>
-        <p:spPr>
-          <a:xfrm>
-            <a:off x="2926080" y="5669280"/>
-            <a:ext cx="6309360" cy="566928"/>
-          </a:xfrm>
-          <a:prstGeom prst="roundRect">
-            <a:avLst>
-              <a:gd name="adj" fmla="val 12903"/>
-            </a:avLst>
-          </a:prstGeom>
-          <a:solidFill>
-            <a:srgbClr val="0B1828"/>
-          </a:solidFill>
-          <a:ln w="13970">
-            <a:solidFill>
-              <a:srgbClr val="59D08F"/>
-            </a:solidFill>
-          </a:ln>
-        </p:spPr>
-        <p:txBody>
-          <a:bodyPr wrap="square" lIns="1016" tIns="1016" rIns="1016" bIns="1016" rtlCol="0" anchor="ctr">
-            <a:normAutofit/>
-          </a:bodyPr>
-          <a:lstStyle/>
-          <a:p>
-            <a:pPr marL="0" indent="0" algn="ctr">
-              <a:buNone/>
-            </a:pPr>
-            <a:r>
-              <a:rPr lang="en-US" sz="1250" dirty="0">
-                <a:solidFill>
-                  <a:srgbClr val="B2BAC8"/>
-                </a:solidFill>
-              </a:rPr>
-              <a:t>Design win: vector-store-type and vector-store-endpoint are SSM parameters, so the upgrade path is operationally clean.</a:t>
-            </a:r>
-            <a:endParaRPr lang="en-US" sz="1250" dirty="0"/>
-          </a:p>
-        </p:txBody>
-      </p:sp>
-      <p:sp>
-        <p:nvSpPr>
-          <p:cNvPr id="20" name="Text 18"/>
-          <p:cNvSpPr/>
-          <p:nvPr/>
-        </p:nvSpPr>
-        <p:spPr>
-          <a:xfrm>
-            <a:off x="566928" y="6327648"/>
-            <a:ext cx="10378440" cy="219456"/>
-          </a:xfrm>
-          <a:prstGeom prst="rect">
-            <a:avLst/>
-          </a:prstGeom>
-          <a:noFill/>
-          <a:ln/>
-        </p:spPr>
-        <p:txBody>
-          <a:bodyPr wrap="square" lIns="0" tIns="0" rIns="0" bIns="0" rtlCol="0" anchor="ctr">
-            <a:normAutofit/>
-          </a:bodyPr>
-          <a:lstStyle/>
-          <a:p>
-            <a:pPr marL="0" indent="0">
-              <a:buNone/>
-            </a:pPr>
-            <a:r>
-              <a:rPr lang="en-US" sz="850" dirty="0">
-                <a:solidFill>
-                  <a:srgbClr val="7E8796"/>
-                </a:solidFill>
-              </a:rPr>
-              <a:t>S3 vs OpenSearch cost and upgrade guidance come from the retrospective cost analysis.</a:t>
-            </a:r>
-            <a:endParaRPr lang="en-US" sz="850" dirty="0"/>
-          </a:p>
-        </p:txBody>
-      </p:sp>
-      <p:sp>
-        <p:nvSpPr>
-          <p:cNvPr id="25" name="Slide Number Placeholder 0"/>
-          <p:cNvSpPr>
-            <a:spLocks noGrp="1"/>
-          </p:cNvSpPr>
-          <p:nvPr>
-            <p:ph type="sldNum" sz="quarter" idx="4294967295"/>
-          </p:nvPr>
-        </p:nvSpPr>
-        <p:spPr>
-          <a:xfrm>
-            <a:off x="11631168" y="6547104"/>
-            <a:ext cx="800000" cy="300000"/>
-          </a:xfrm>
-          <a:prstGeom prst="rect">
-            <a:avLst/>
-          </a:prstGeom>
-          <a:extLst>
-            <a:ext uri="{C572A759-6A51-4108-AA02-DFA0A04FC94B}">
-              <ma14:wrappingTextBoxFlag xmlns="" xmlns:ma14="http://schemas.microsoft.com/office/mac/drawingml/2011/main" val="0"/>
-            </a:ext>
-          </a:extLst>
-        </p:spPr>
-        <p:txBody>
-          <a:bodyPr/>
-          <a:lstStyle>
-            <a:lvl1pPr>
-              <a:defRPr sz="800">
-                <a:solidFill>
-                  <a:srgbClr val="515A67"/>
-                </a:solidFill>
-                <a:latin typeface="Segoe UI"/>
-                <a:ea typeface="Segoe UI"/>
-                <a:cs typeface="Segoe UI"/>
-              </a:defRPr>
-            </a:lvl1pPr>
-          </a:lstStyle>
-          <a:p>
-            <a:pPr algn="l"/>
-            <a:fld id="{F7021451-1387-4CA6-816F-3879F97B5CBC}" type="slidenum">
-              <a:rPr lang="en-US" b="0"/>
-              <a:t>29</a:t>
-            </a:fld>
-            <a:endParaRPr lang="en-US"/>
           </a:p>
         </p:txBody>
       </p:sp>
@@ -32476,7 +31704,7 @@
           </a:prstGeom>
           <a:extLst>
             <a:ext uri="{C572A759-6A51-4108-AA02-DFA0A04FC94B}">
-              <ma14:wrappingTextBoxFlag xmlns="" xmlns:ma14="http://schemas.microsoft.com/office/mac/drawingml/2011/main" val="0"/>
+              <ma14:wrappingTextBoxFlag xmlns:ma14="http://schemas.microsoft.com/office/mac/drawingml/2011/main" xmlns="" val="0"/>
             </a:ext>
           </a:extLst>
         </p:spPr>
@@ -32584,6 +31812,943 @@
 </file>
 
 <file path=ppt/slides/slide30.xml><?xml version="1.0" encoding="utf-8"?>
+<p:sld xmlns:a="http://schemas.openxmlformats.org/drawingml/2006/main" xmlns:r="http://schemas.openxmlformats.org/officeDocument/2006/relationships" xmlns:p="http://schemas.openxmlformats.org/presentationml/2006/main">
+  <p:cSld name="Slide 9">
+    <p:bg>
+      <p:bgPr>
+        <a:solidFill>
+          <a:srgbClr val="000000"/>
+        </a:solidFill>
+        <a:effectLst/>
+      </p:bgPr>
+    </p:bg>
+    <p:spTree>
+      <p:nvGrpSpPr>
+        <p:cNvPr id="1" name=""/>
+        <p:cNvGrpSpPr/>
+        <p:nvPr/>
+      </p:nvGrpSpPr>
+      <p:grpSpPr>
+        <a:xfrm>
+          <a:off x="0" y="0"/>
+          <a:ext cx="0" cy="0"/>
+          <a:chOff x="0" y="0"/>
+          <a:chExt cx="0" cy="0"/>
+        </a:xfrm>
+      </p:grpSpPr>
+      <p:sp>
+        <p:nvSpPr>
+          <p:cNvPr id="2" name="Text 0"/>
+          <p:cNvSpPr/>
+          <p:nvPr/>
+        </p:nvSpPr>
+        <p:spPr>
+          <a:xfrm>
+            <a:off x="566928" y="384048"/>
+            <a:ext cx="7589520" cy="219456"/>
+          </a:xfrm>
+          <a:prstGeom prst="rect">
+            <a:avLst/>
+          </a:prstGeom>
+          <a:noFill/>
+          <a:ln/>
+        </p:spPr>
+        <p:txBody>
+          <a:bodyPr wrap="square" lIns="0" tIns="0" rIns="0" bIns="0" rtlCol="0" anchor="ctr"/>
+          <a:lstStyle/>
+          <a:p>
+            <a:pPr marL="0" indent="0">
+              <a:buNone/>
+            </a:pPr>
+            <a:r>
+              <a:rPr lang="en-US" sz="850" b="1" dirty="0">
+                <a:solidFill>
+                  <a:srgbClr val="59C4FF"/>
+                </a:solidFill>
+              </a:rPr>
+              <a:t>COST DECISION</a:t>
+            </a:r>
+            <a:endParaRPr lang="en-US" sz="850" dirty="0"/>
+          </a:p>
+        </p:txBody>
+      </p:sp>
+      <p:sp>
+        <p:nvSpPr>
+          <p:cNvPr id="3" name="Text 1"/>
+          <p:cNvSpPr/>
+          <p:nvPr/>
+        </p:nvSpPr>
+        <p:spPr>
+          <a:xfrm>
+            <a:off x="530352" y="658368"/>
+            <a:ext cx="10927080" cy="493776"/>
+          </a:xfrm>
+          <a:prstGeom prst="rect">
+            <a:avLst/>
+          </a:prstGeom>
+          <a:noFill/>
+          <a:ln/>
+        </p:spPr>
+        <p:txBody>
+          <a:bodyPr wrap="square" lIns="0" tIns="0" rIns="0" bIns="0" rtlCol="0" anchor="ctr">
+            <a:normAutofit/>
+          </a:bodyPr>
+          <a:lstStyle/>
+          <a:p>
+            <a:pPr marL="0" indent="0">
+              <a:buNone/>
+            </a:pPr>
+            <a:r>
+              <a:rPr lang="en-US" sz="2950" b="1" dirty="0">
+                <a:solidFill>
+                  <a:srgbClr val="F5F7FA"/>
+                </a:solidFill>
+              </a:rPr>
+              <a:t>S3 as the first vector store is the right kind of cheap</a:t>
+            </a:r>
+            <a:endParaRPr lang="en-US" sz="2950" dirty="0"/>
+          </a:p>
+        </p:txBody>
+      </p:sp>
+      <p:sp>
+        <p:nvSpPr>
+          <p:cNvPr id="4" name="Text 2"/>
+          <p:cNvSpPr/>
+          <p:nvPr/>
+        </p:nvSpPr>
+        <p:spPr>
+          <a:xfrm>
+            <a:off x="621792" y="1325880"/>
+            <a:ext cx="10216537" cy="713232"/>
+          </a:xfrm>
+          <a:prstGeom prst="rect">
+            <a:avLst/>
+          </a:prstGeom>
+          <a:noFill/>
+          <a:ln/>
+        </p:spPr>
+        <p:txBody>
+          <a:bodyPr wrap="square" lIns="254" tIns="254" rIns="254" bIns="254" rtlCol="0" anchor="t">
+            <a:normAutofit/>
+          </a:bodyPr>
+          <a:lstStyle/>
+          <a:p>
+            <a:pPr marL="0" indent="0" algn="l">
+              <a:buNone/>
+            </a:pPr>
+            <a:r>
+              <a:rPr lang="en-US" sz="1600" dirty="0">
+                <a:solidFill>
+                  <a:srgbClr val="B2BAC8"/>
+                </a:solidFill>
+              </a:rPr>
+              <a:t>This is one of those choices where CTO discipline matters. For the MVP, S3 is not the “best vector database.” It is the best way to avoid paying for one before the workload proves it deserves one; it is </a:t>
+            </a:r>
+            <a:r>
+              <a:rPr lang="en-US" sz="1600" b="1" dirty="0">
+                <a:solidFill>
+                  <a:srgbClr val="B2BAC8"/>
+                </a:solidFill>
+              </a:rPr>
+              <a:t>fit to purpose </a:t>
+            </a:r>
+            <a:r>
+              <a:rPr lang="en-US" sz="1600" dirty="0">
+                <a:solidFill>
+                  <a:srgbClr val="B2BAC8"/>
+                </a:solidFill>
+              </a:rPr>
+              <a:t>engineering.</a:t>
+            </a:r>
+            <a:endParaRPr lang="en-US" sz="1600" dirty="0"/>
+          </a:p>
+        </p:txBody>
+      </p:sp>
+      <p:sp>
+        <p:nvSpPr>
+          <p:cNvPr id="5" name="Text 3"/>
+          <p:cNvSpPr/>
+          <p:nvPr/>
+        </p:nvSpPr>
+        <p:spPr>
+          <a:xfrm>
+            <a:off x="2924285" y="2395728"/>
+            <a:ext cx="2743200" cy="310896"/>
+          </a:xfrm>
+          <a:prstGeom prst="rect">
+            <a:avLst/>
+          </a:prstGeom>
+          <a:noFill/>
+          <a:ln/>
+        </p:spPr>
+        <p:txBody>
+          <a:bodyPr wrap="square" lIns="254" tIns="254" rIns="254" bIns="254" rtlCol="0" anchor="t">
+            <a:normAutofit/>
+          </a:bodyPr>
+          <a:lstStyle/>
+          <a:p>
+            <a:pPr marL="0" indent="0" algn="ctr">
+              <a:buNone/>
+            </a:pPr>
+            <a:r>
+              <a:rPr lang="en-US" sz="1400" b="1" dirty="0">
+                <a:solidFill>
+                  <a:srgbClr val="59C4FF"/>
+                </a:solidFill>
+              </a:rPr>
+              <a:t>S3 JSON embeddings</a:t>
+            </a:r>
+            <a:endParaRPr lang="en-US" sz="1400" dirty="0"/>
+          </a:p>
+        </p:txBody>
+      </p:sp>
+      <p:sp>
+        <p:nvSpPr>
+          <p:cNvPr id="6" name="Text 4"/>
+          <p:cNvSpPr/>
+          <p:nvPr/>
+        </p:nvSpPr>
+        <p:spPr>
+          <a:xfrm>
+            <a:off x="6873238" y="2395728"/>
+            <a:ext cx="3063240" cy="310896"/>
+          </a:xfrm>
+          <a:prstGeom prst="rect">
+            <a:avLst/>
+          </a:prstGeom>
+          <a:noFill/>
+          <a:ln/>
+        </p:spPr>
+        <p:txBody>
+          <a:bodyPr wrap="square" lIns="254" tIns="254" rIns="254" bIns="254" rtlCol="0" anchor="t">
+            <a:normAutofit/>
+          </a:bodyPr>
+          <a:lstStyle/>
+          <a:p>
+            <a:pPr marL="0" indent="0" algn="ctr">
+              <a:buNone/>
+            </a:pPr>
+            <a:r>
+              <a:rPr lang="en-US" sz="1400" b="1" dirty="0">
+                <a:solidFill>
+                  <a:srgbClr val="FFD65A"/>
+                </a:solidFill>
+              </a:rPr>
+              <a:t>OpenSearch Serverless / pgvector</a:t>
+            </a:r>
+            <a:endParaRPr lang="en-US" sz="1400" dirty="0"/>
+          </a:p>
+        </p:txBody>
+      </p:sp>
+      <p:sp>
+        <p:nvSpPr>
+          <p:cNvPr id="7" name="Text 5"/>
+          <p:cNvSpPr/>
+          <p:nvPr/>
+        </p:nvSpPr>
+        <p:spPr>
+          <a:xfrm>
+            <a:off x="1235335" y="2834640"/>
+            <a:ext cx="1508760" cy="347472"/>
+          </a:xfrm>
+          <a:prstGeom prst="roundRect">
+            <a:avLst>
+              <a:gd name="adj" fmla="val 13158"/>
+            </a:avLst>
+          </a:prstGeom>
+          <a:solidFill>
+            <a:srgbClr val="1C2430"/>
+          </a:solidFill>
+          <a:ln>
+            <a:solidFill>
+              <a:srgbClr val="1C2430">
+                <a:alpha val="0"/>
+              </a:srgbClr>
+            </a:solidFill>
+          </a:ln>
+        </p:spPr>
+        <p:txBody>
+          <a:bodyPr wrap="square" lIns="635" tIns="635" rIns="635" bIns="635" rtlCol="0" anchor="ctr">
+            <a:normAutofit/>
+          </a:bodyPr>
+          <a:lstStyle/>
+          <a:p>
+            <a:pPr marL="0" indent="0" algn="ctr">
+              <a:buNone/>
+            </a:pPr>
+            <a:r>
+              <a:rPr lang="en-US" sz="950" b="1" dirty="0">
+                <a:solidFill>
+                  <a:srgbClr val="B2BAC8"/>
+                </a:solidFill>
+              </a:rPr>
+              <a:t>Idle cost</a:t>
+            </a:r>
+            <a:endParaRPr lang="en-US" sz="950" dirty="0"/>
+          </a:p>
+        </p:txBody>
+      </p:sp>
+      <p:sp>
+        <p:nvSpPr>
+          <p:cNvPr id="8" name="Text 6"/>
+          <p:cNvSpPr/>
+          <p:nvPr/>
+        </p:nvSpPr>
+        <p:spPr>
+          <a:xfrm>
+            <a:off x="2862967" y="2779776"/>
+            <a:ext cx="2743200" cy="457200"/>
+          </a:xfrm>
+          <a:prstGeom prst="roundRect">
+            <a:avLst>
+              <a:gd name="adj" fmla="val 16000"/>
+            </a:avLst>
+          </a:prstGeom>
+          <a:solidFill>
+            <a:srgbClr val="071A2D"/>
+          </a:solidFill>
+          <a:ln w="13970">
+            <a:solidFill>
+              <a:srgbClr val="2F9BFF"/>
+            </a:solidFill>
+          </a:ln>
+        </p:spPr>
+        <p:txBody>
+          <a:bodyPr wrap="square" lIns="1016" tIns="1016" rIns="1016" bIns="1016" rtlCol="0" anchor="ctr">
+            <a:normAutofit/>
+          </a:bodyPr>
+          <a:lstStyle/>
+          <a:p>
+            <a:pPr marL="0" indent="0" algn="ctr">
+              <a:buNone/>
+            </a:pPr>
+            <a:r>
+              <a:rPr lang="en-US" sz="1080" dirty="0">
+                <a:solidFill>
+                  <a:srgbClr val="F5F7FA"/>
+                </a:solidFill>
+              </a:rPr>
+              <a:t>$0 storage only</a:t>
+            </a:r>
+            <a:endParaRPr lang="en-US" sz="1080" dirty="0"/>
+          </a:p>
+        </p:txBody>
+      </p:sp>
+      <p:sp>
+        <p:nvSpPr>
+          <p:cNvPr id="9" name="Text 7"/>
+          <p:cNvSpPr/>
+          <p:nvPr/>
+        </p:nvSpPr>
+        <p:spPr>
+          <a:xfrm>
+            <a:off x="6840607" y="2779776"/>
+            <a:ext cx="3154680" cy="457200"/>
+          </a:xfrm>
+          <a:prstGeom prst="roundRect">
+            <a:avLst>
+              <a:gd name="adj" fmla="val 16000"/>
+            </a:avLst>
+          </a:prstGeom>
+          <a:solidFill>
+            <a:srgbClr val="071A2D"/>
+          </a:solidFill>
+          <a:ln w="13970">
+            <a:solidFill>
+              <a:srgbClr val="FFD65A"/>
+            </a:solidFill>
+          </a:ln>
+        </p:spPr>
+        <p:txBody>
+          <a:bodyPr wrap="square" lIns="1016" tIns="1016" rIns="1016" bIns="1016" rtlCol="0" anchor="ctr">
+            <a:normAutofit/>
+          </a:bodyPr>
+          <a:lstStyle/>
+          <a:p>
+            <a:pPr marL="0" indent="0" algn="ctr">
+              <a:buNone/>
+            </a:pPr>
+            <a:r>
+              <a:rPr lang="en-US" sz="1080" dirty="0">
+                <a:solidFill>
+                  <a:srgbClr val="F5F7FA"/>
+                </a:solidFill>
+              </a:rPr>
+              <a:t>~$175/month minimum</a:t>
+            </a:r>
+            <a:endParaRPr lang="en-US" sz="1080" dirty="0"/>
+          </a:p>
+        </p:txBody>
+      </p:sp>
+      <p:sp>
+        <p:nvSpPr>
+          <p:cNvPr id="10" name="Text 8"/>
+          <p:cNvSpPr/>
+          <p:nvPr/>
+        </p:nvSpPr>
+        <p:spPr>
+          <a:xfrm>
+            <a:off x="1235335" y="3493008"/>
+            <a:ext cx="1508760" cy="347472"/>
+          </a:xfrm>
+          <a:prstGeom prst="roundRect">
+            <a:avLst>
+              <a:gd name="adj" fmla="val 13158"/>
+            </a:avLst>
+          </a:prstGeom>
+          <a:solidFill>
+            <a:srgbClr val="1C2430"/>
+          </a:solidFill>
+          <a:ln>
+            <a:solidFill>
+              <a:srgbClr val="1C2430">
+                <a:alpha val="0"/>
+              </a:srgbClr>
+            </a:solidFill>
+          </a:ln>
+        </p:spPr>
+        <p:txBody>
+          <a:bodyPr wrap="square" lIns="635" tIns="635" rIns="635" bIns="635" rtlCol="0" anchor="ctr">
+            <a:normAutofit/>
+          </a:bodyPr>
+          <a:lstStyle/>
+          <a:p>
+            <a:pPr marL="0" indent="0" algn="ctr">
+              <a:buNone/>
+            </a:pPr>
+            <a:r>
+              <a:rPr lang="en-US" sz="950" b="1" dirty="0">
+                <a:solidFill>
+                  <a:srgbClr val="B2BAC8"/>
+                </a:solidFill>
+              </a:rPr>
+              <a:t>Read pattern</a:t>
+            </a:r>
+            <a:endParaRPr lang="en-US" sz="950" dirty="0"/>
+          </a:p>
+        </p:txBody>
+      </p:sp>
+      <p:sp>
+        <p:nvSpPr>
+          <p:cNvPr id="11" name="Text 9"/>
+          <p:cNvSpPr/>
+          <p:nvPr/>
+        </p:nvSpPr>
+        <p:spPr>
+          <a:xfrm>
+            <a:off x="2862967" y="3438144"/>
+            <a:ext cx="2743200" cy="457200"/>
+          </a:xfrm>
+          <a:prstGeom prst="roundRect">
+            <a:avLst>
+              <a:gd name="adj" fmla="val 16000"/>
+            </a:avLst>
+          </a:prstGeom>
+          <a:solidFill>
+            <a:srgbClr val="071A2D"/>
+          </a:solidFill>
+          <a:ln w="13970">
+            <a:solidFill>
+              <a:srgbClr val="2F9BFF"/>
+            </a:solidFill>
+          </a:ln>
+        </p:spPr>
+        <p:txBody>
+          <a:bodyPr wrap="square" lIns="1016" tIns="1016" rIns="1016" bIns="1016" rtlCol="0" anchor="ctr">
+            <a:normAutofit/>
+          </a:bodyPr>
+          <a:lstStyle/>
+          <a:p>
+            <a:pPr marL="0" indent="0" algn="ctr">
+              <a:buNone/>
+            </a:pPr>
+            <a:r>
+              <a:rPr lang="en-US" sz="1080" dirty="0">
+                <a:solidFill>
+                  <a:srgbClr val="F5F7FA"/>
+                </a:solidFill>
+              </a:rPr>
+              <a:t>Per-submission retrieval</a:t>
+            </a:r>
+            <a:endParaRPr lang="en-US" sz="1080" dirty="0"/>
+          </a:p>
+        </p:txBody>
+      </p:sp>
+      <p:sp>
+        <p:nvSpPr>
+          <p:cNvPr id="12" name="Text 10"/>
+          <p:cNvSpPr/>
+          <p:nvPr/>
+        </p:nvSpPr>
+        <p:spPr>
+          <a:xfrm>
+            <a:off x="6840607" y="3438144"/>
+            <a:ext cx="3154680" cy="457200"/>
+          </a:xfrm>
+          <a:prstGeom prst="roundRect">
+            <a:avLst>
+              <a:gd name="adj" fmla="val 16000"/>
+            </a:avLst>
+          </a:prstGeom>
+          <a:solidFill>
+            <a:srgbClr val="071A2D"/>
+          </a:solidFill>
+          <a:ln w="13970">
+            <a:solidFill>
+              <a:srgbClr val="FFD65A"/>
+            </a:solidFill>
+          </a:ln>
+        </p:spPr>
+        <p:txBody>
+          <a:bodyPr wrap="square" lIns="1016" tIns="1016" rIns="1016" bIns="1016" rtlCol="0" anchor="ctr">
+            <a:normAutofit/>
+          </a:bodyPr>
+          <a:lstStyle/>
+          <a:p>
+            <a:pPr marL="0" indent="0" algn="ctr">
+              <a:buNone/>
+            </a:pPr>
+            <a:r>
+              <a:rPr lang="en-US" sz="1080" dirty="0">
+                <a:solidFill>
+                  <a:srgbClr val="F5F7FA"/>
+                </a:solidFill>
+              </a:rPr>
+              <a:t>Similarity search across corpora</a:t>
+            </a:r>
+            <a:endParaRPr lang="en-US" sz="1080" dirty="0"/>
+          </a:p>
+        </p:txBody>
+      </p:sp>
+      <p:sp>
+        <p:nvSpPr>
+          <p:cNvPr id="13" name="Text 11"/>
+          <p:cNvSpPr/>
+          <p:nvPr/>
+        </p:nvSpPr>
+        <p:spPr>
+          <a:xfrm>
+            <a:off x="1235335" y="4151376"/>
+            <a:ext cx="1508760" cy="347472"/>
+          </a:xfrm>
+          <a:prstGeom prst="roundRect">
+            <a:avLst>
+              <a:gd name="adj" fmla="val 13158"/>
+            </a:avLst>
+          </a:prstGeom>
+          <a:solidFill>
+            <a:srgbClr val="1C2430"/>
+          </a:solidFill>
+          <a:ln>
+            <a:solidFill>
+              <a:srgbClr val="1C2430">
+                <a:alpha val="0"/>
+              </a:srgbClr>
+            </a:solidFill>
+          </a:ln>
+        </p:spPr>
+        <p:txBody>
+          <a:bodyPr wrap="square" lIns="635" tIns="635" rIns="635" bIns="635" rtlCol="0" anchor="ctr">
+            <a:normAutofit/>
+          </a:bodyPr>
+          <a:lstStyle/>
+          <a:p>
+            <a:pPr marL="0" indent="0" algn="ctr">
+              <a:buNone/>
+            </a:pPr>
+            <a:r>
+              <a:rPr lang="en-US" sz="950" b="1" dirty="0">
+                <a:solidFill>
+                  <a:srgbClr val="B2BAC8"/>
+                </a:solidFill>
+              </a:rPr>
+              <a:t>Latency</a:t>
+            </a:r>
+            <a:endParaRPr lang="en-US" sz="950" dirty="0"/>
+          </a:p>
+        </p:txBody>
+      </p:sp>
+      <p:sp>
+        <p:nvSpPr>
+          <p:cNvPr id="14" name="Text 12"/>
+          <p:cNvSpPr/>
+          <p:nvPr/>
+        </p:nvSpPr>
+        <p:spPr>
+          <a:xfrm>
+            <a:off x="2862967" y="4096512"/>
+            <a:ext cx="2743200" cy="457200"/>
+          </a:xfrm>
+          <a:prstGeom prst="roundRect">
+            <a:avLst>
+              <a:gd name="adj" fmla="val 16000"/>
+            </a:avLst>
+          </a:prstGeom>
+          <a:solidFill>
+            <a:srgbClr val="071A2D"/>
+          </a:solidFill>
+          <a:ln w="13970">
+            <a:solidFill>
+              <a:srgbClr val="2F9BFF"/>
+            </a:solidFill>
+          </a:ln>
+        </p:spPr>
+        <p:txBody>
+          <a:bodyPr wrap="square" lIns="1016" tIns="1016" rIns="1016" bIns="1016" rtlCol="0" anchor="ctr">
+            <a:normAutofit/>
+          </a:bodyPr>
+          <a:lstStyle/>
+          <a:p>
+            <a:pPr marL="0" indent="0" algn="ctr">
+              <a:buNone/>
+            </a:pPr>
+            <a:r>
+              <a:rPr lang="en-US" sz="1080" dirty="0">
+                <a:solidFill>
+                  <a:srgbClr val="F5F7FA"/>
+                </a:solidFill>
+              </a:rPr>
+              <a:t>~50-100 </a:t>
+            </a:r>
+            <a:r>
+              <a:rPr lang="en-US" sz="1080" dirty="0" err="1">
+                <a:solidFill>
+                  <a:srgbClr val="F5F7FA"/>
+                </a:solidFill>
+              </a:rPr>
+              <a:t>ms</a:t>
+            </a:r>
+            <a:endParaRPr lang="en-US" sz="1080" dirty="0"/>
+          </a:p>
+        </p:txBody>
+      </p:sp>
+      <p:sp>
+        <p:nvSpPr>
+          <p:cNvPr id="15" name="Text 13"/>
+          <p:cNvSpPr/>
+          <p:nvPr/>
+        </p:nvSpPr>
+        <p:spPr>
+          <a:xfrm>
+            <a:off x="6840607" y="4096512"/>
+            <a:ext cx="3154680" cy="457200"/>
+          </a:xfrm>
+          <a:prstGeom prst="roundRect">
+            <a:avLst>
+              <a:gd name="adj" fmla="val 16000"/>
+            </a:avLst>
+          </a:prstGeom>
+          <a:solidFill>
+            <a:srgbClr val="071A2D"/>
+          </a:solidFill>
+          <a:ln w="13970">
+            <a:solidFill>
+              <a:srgbClr val="FFD65A"/>
+            </a:solidFill>
+          </a:ln>
+        </p:spPr>
+        <p:txBody>
+          <a:bodyPr wrap="square" lIns="1016" tIns="1016" rIns="1016" bIns="1016" rtlCol="0" anchor="ctr">
+            <a:normAutofit/>
+          </a:bodyPr>
+          <a:lstStyle/>
+          <a:p>
+            <a:pPr marL="0" indent="0" algn="ctr">
+              <a:buNone/>
+            </a:pPr>
+            <a:r>
+              <a:rPr lang="en-US" sz="1080" dirty="0">
+                <a:solidFill>
+                  <a:srgbClr val="F5F7FA"/>
+                </a:solidFill>
+              </a:rPr>
+              <a:t>~10 ms query path</a:t>
+            </a:r>
+            <a:endParaRPr lang="en-US" sz="1080" dirty="0"/>
+          </a:p>
+        </p:txBody>
+      </p:sp>
+      <p:sp>
+        <p:nvSpPr>
+          <p:cNvPr id="16" name="Text 14"/>
+          <p:cNvSpPr/>
+          <p:nvPr/>
+        </p:nvSpPr>
+        <p:spPr>
+          <a:xfrm>
+            <a:off x="1235335" y="4809744"/>
+            <a:ext cx="1508760" cy="347472"/>
+          </a:xfrm>
+          <a:prstGeom prst="roundRect">
+            <a:avLst>
+              <a:gd name="adj" fmla="val 13158"/>
+            </a:avLst>
+          </a:prstGeom>
+          <a:solidFill>
+            <a:srgbClr val="1C2430"/>
+          </a:solidFill>
+          <a:ln>
+            <a:solidFill>
+              <a:srgbClr val="1C2430">
+                <a:alpha val="0"/>
+              </a:srgbClr>
+            </a:solidFill>
+          </a:ln>
+        </p:spPr>
+        <p:txBody>
+          <a:bodyPr wrap="square" lIns="635" tIns="635" rIns="635" bIns="635" rtlCol="0" anchor="ctr">
+            <a:normAutofit/>
+          </a:bodyPr>
+          <a:lstStyle/>
+          <a:p>
+            <a:pPr marL="0" indent="0" algn="ctr">
+              <a:buNone/>
+            </a:pPr>
+            <a:r>
+              <a:rPr lang="en-US" sz="950" b="1" dirty="0">
+                <a:solidFill>
+                  <a:srgbClr val="B2BAC8"/>
+                </a:solidFill>
+              </a:rPr>
+              <a:t>Move when</a:t>
+            </a:r>
+            <a:endParaRPr lang="en-US" sz="950" dirty="0"/>
+          </a:p>
+        </p:txBody>
+      </p:sp>
+      <p:sp>
+        <p:nvSpPr>
+          <p:cNvPr id="17" name="Text 15"/>
+          <p:cNvSpPr/>
+          <p:nvPr/>
+        </p:nvSpPr>
+        <p:spPr>
+          <a:xfrm>
+            <a:off x="2862967" y="4754880"/>
+            <a:ext cx="2743200" cy="457200"/>
+          </a:xfrm>
+          <a:prstGeom prst="roundRect">
+            <a:avLst>
+              <a:gd name="adj" fmla="val 16000"/>
+            </a:avLst>
+          </a:prstGeom>
+          <a:solidFill>
+            <a:srgbClr val="071A2D"/>
+          </a:solidFill>
+          <a:ln w="13970">
+            <a:solidFill>
+              <a:srgbClr val="2F9BFF"/>
+            </a:solidFill>
+          </a:ln>
+        </p:spPr>
+        <p:txBody>
+          <a:bodyPr wrap="square" lIns="1016" tIns="1016" rIns="1016" bIns="1016" rtlCol="0" anchor="ctr">
+            <a:normAutofit/>
+          </a:bodyPr>
+          <a:lstStyle/>
+          <a:p>
+            <a:pPr marL="0" indent="0" algn="ctr">
+              <a:buNone/>
+            </a:pPr>
+            <a:r>
+              <a:rPr lang="en-US" sz="1080" dirty="0">
+                <a:solidFill>
+                  <a:srgbClr val="F5F7FA"/>
+                </a:solidFill>
+              </a:rPr>
+              <a:t>MVP and variable load</a:t>
+            </a:r>
+            <a:endParaRPr lang="en-US" sz="1080" dirty="0"/>
+          </a:p>
+        </p:txBody>
+      </p:sp>
+      <p:sp>
+        <p:nvSpPr>
+          <p:cNvPr id="18" name="Text 16"/>
+          <p:cNvSpPr/>
+          <p:nvPr/>
+        </p:nvSpPr>
+        <p:spPr>
+          <a:xfrm>
+            <a:off x="6840607" y="4754880"/>
+            <a:ext cx="3154680" cy="457200"/>
+          </a:xfrm>
+          <a:prstGeom prst="roundRect">
+            <a:avLst>
+              <a:gd name="adj" fmla="val 16000"/>
+            </a:avLst>
+          </a:prstGeom>
+          <a:solidFill>
+            <a:srgbClr val="071A2D"/>
+          </a:solidFill>
+          <a:ln w="13970">
+            <a:solidFill>
+              <a:srgbClr val="FFD65A"/>
+            </a:solidFill>
+          </a:ln>
+        </p:spPr>
+        <p:txBody>
+          <a:bodyPr wrap="square" lIns="1016" tIns="1016" rIns="1016" bIns="1016" rtlCol="0" anchor="ctr">
+            <a:normAutofit/>
+          </a:bodyPr>
+          <a:lstStyle/>
+          <a:p>
+            <a:pPr marL="0" indent="0" algn="ctr">
+              <a:buNone/>
+            </a:pPr>
+            <a:r>
+              <a:rPr lang="en-US" sz="1080" dirty="0">
+                <a:solidFill>
+                  <a:srgbClr val="F5F7FA"/>
+                </a:solidFill>
+              </a:rPr>
+              <a:t>&gt;50K presentations/month or cross-submission search</a:t>
+            </a:r>
+            <a:endParaRPr lang="en-US" sz="1080" dirty="0"/>
+          </a:p>
+        </p:txBody>
+      </p:sp>
+      <p:sp>
+        <p:nvSpPr>
+          <p:cNvPr id="19" name="Text 17"/>
+          <p:cNvSpPr/>
+          <p:nvPr/>
+        </p:nvSpPr>
+        <p:spPr>
+          <a:xfrm>
+            <a:off x="2926080" y="5669280"/>
+            <a:ext cx="6309360" cy="566928"/>
+          </a:xfrm>
+          <a:prstGeom prst="roundRect">
+            <a:avLst>
+              <a:gd name="adj" fmla="val 12903"/>
+            </a:avLst>
+          </a:prstGeom>
+          <a:solidFill>
+            <a:srgbClr val="0B1828"/>
+          </a:solidFill>
+          <a:ln w="13970">
+            <a:solidFill>
+              <a:srgbClr val="59D08F"/>
+            </a:solidFill>
+          </a:ln>
+        </p:spPr>
+        <p:txBody>
+          <a:bodyPr wrap="square" lIns="1016" tIns="1016" rIns="1016" bIns="1016" rtlCol="0" anchor="ctr">
+            <a:normAutofit/>
+          </a:bodyPr>
+          <a:lstStyle/>
+          <a:p>
+            <a:pPr marL="0" indent="0" algn="ctr">
+              <a:buNone/>
+            </a:pPr>
+            <a:r>
+              <a:rPr lang="en-US" sz="1250" dirty="0">
+                <a:solidFill>
+                  <a:srgbClr val="B2BAC8"/>
+                </a:solidFill>
+              </a:rPr>
+              <a:t>Design win: vector-store-type and vector-store-endpoint are SSM parameters, so the upgrade path is operationally clean.</a:t>
+            </a:r>
+            <a:endParaRPr lang="en-US" sz="1250" dirty="0"/>
+          </a:p>
+        </p:txBody>
+      </p:sp>
+      <p:sp>
+        <p:nvSpPr>
+          <p:cNvPr id="20" name="Text 18"/>
+          <p:cNvSpPr/>
+          <p:nvPr/>
+        </p:nvSpPr>
+        <p:spPr>
+          <a:xfrm>
+            <a:off x="566928" y="6327648"/>
+            <a:ext cx="10378440" cy="219456"/>
+          </a:xfrm>
+          <a:prstGeom prst="rect">
+            <a:avLst/>
+          </a:prstGeom>
+          <a:noFill/>
+          <a:ln/>
+        </p:spPr>
+        <p:txBody>
+          <a:bodyPr wrap="square" lIns="0" tIns="0" rIns="0" bIns="0" rtlCol="0" anchor="ctr">
+            <a:normAutofit/>
+          </a:bodyPr>
+          <a:lstStyle/>
+          <a:p>
+            <a:pPr marL="0" indent="0">
+              <a:buNone/>
+            </a:pPr>
+            <a:r>
+              <a:rPr lang="en-US" sz="850" dirty="0">
+                <a:solidFill>
+                  <a:srgbClr val="7E8796"/>
+                </a:solidFill>
+              </a:rPr>
+              <a:t>S3 vs OpenSearch cost and upgrade guidance come from the retrospective cost analysis.</a:t>
+            </a:r>
+            <a:endParaRPr lang="en-US" sz="850" dirty="0"/>
+          </a:p>
+        </p:txBody>
+      </p:sp>
+      <p:sp>
+        <p:nvSpPr>
+          <p:cNvPr id="25" name="Slide Number Placeholder 0"/>
+          <p:cNvSpPr>
+            <a:spLocks noGrp="1"/>
+          </p:cNvSpPr>
+          <p:nvPr>
+            <p:ph type="sldNum" sz="quarter" idx="4294967295"/>
+          </p:nvPr>
+        </p:nvSpPr>
+        <p:spPr>
+          <a:xfrm>
+            <a:off x="11631168" y="6547104"/>
+            <a:ext cx="800000" cy="300000"/>
+          </a:xfrm>
+          <a:prstGeom prst="rect">
+            <a:avLst/>
+          </a:prstGeom>
+          <a:extLst>
+            <a:ext uri="{C572A759-6A51-4108-AA02-DFA0A04FC94B}">
+              <ma14:wrappingTextBoxFlag xmlns:ma14="http://schemas.microsoft.com/office/mac/drawingml/2011/main" xmlns="" val="0"/>
+            </a:ext>
+          </a:extLst>
+        </p:spPr>
+        <p:txBody>
+          <a:bodyPr/>
+          <a:lstStyle>
+            <a:lvl1pPr>
+              <a:defRPr sz="800">
+                <a:solidFill>
+                  <a:srgbClr val="515A67"/>
+                </a:solidFill>
+                <a:latin typeface="Segoe UI"/>
+                <a:ea typeface="Segoe UI"/>
+                <a:cs typeface="Segoe UI"/>
+              </a:defRPr>
+            </a:lvl1pPr>
+          </a:lstStyle>
+          <a:p>
+            <a:pPr algn="l"/>
+            <a:fld id="{F7021451-1387-4CA6-816F-3879F97B5CBC}" type="slidenum">
+              <a:rPr lang="en-US" b="0"/>
+              <a:t>30</a:t>
+            </a:fld>
+            <a:endParaRPr lang="en-US"/>
+          </a:p>
+        </p:txBody>
+      </p:sp>
+    </p:spTree>
+  </p:cSld>
+  <p:clrMapOvr>
+    <a:masterClrMapping/>
+  </p:clrMapOvr>
+</p:sld>
+</file>
+
+<file path=ppt/slides/slide31.xml><?xml version="1.0" encoding="utf-8"?>
 <p:sld xmlns:a="http://schemas.openxmlformats.org/drawingml/2006/main" xmlns:r="http://schemas.openxmlformats.org/officeDocument/2006/relationships" xmlns:p="http://schemas.openxmlformats.org/presentationml/2006/main">
   <p:cSld name="Slide 10">
     <p:bg>
@@ -33357,7 +33522,7 @@
           </a:prstGeom>
           <a:extLst>
             <a:ext uri="{C572A759-6A51-4108-AA02-DFA0A04FC94B}">
-              <ma14:wrappingTextBoxFlag xmlns="" xmlns:ma14="http://schemas.microsoft.com/office/mac/drawingml/2011/main" val="0"/>
+              <ma14:wrappingTextBoxFlag xmlns:ma14="http://schemas.microsoft.com/office/mac/drawingml/2011/main" xmlns="" val="0"/>
             </a:ext>
           </a:extLst>
         </p:spPr>
@@ -33379,7 +33544,7 @@
             <a:pPr algn="l"/>
             <a:fld id="{F7021451-1387-4CA6-816F-3879F97B5CBC}" type="slidenum">
               <a:rPr lang="en-US" b="0"/>
-              <a:t>30</a:t>
+              <a:t>31</a:t>
             </a:fld>
             <a:endParaRPr lang="en-US"/>
           </a:p>
@@ -33393,7 +33558,7 @@
 </p:sld>
 </file>
 
-<file path=ppt/slides/slide31.xml><?xml version="1.0" encoding="utf-8"?>
+<file path=ppt/slides/slide32.xml><?xml version="1.0" encoding="utf-8"?>
 <p:sld xmlns:a="http://schemas.openxmlformats.org/drawingml/2006/main" xmlns:r="http://schemas.openxmlformats.org/officeDocument/2006/relationships" xmlns:p="http://schemas.openxmlformats.org/presentationml/2006/main">
   <p:cSld name="Slide 11">
     <p:bg>
@@ -34067,7 +34232,7 @@
           </a:prstGeom>
           <a:extLst>
             <a:ext uri="{C572A759-6A51-4108-AA02-DFA0A04FC94B}">
-              <ma14:wrappingTextBoxFlag xmlns="" xmlns:ma14="http://schemas.microsoft.com/office/mac/drawingml/2011/main" val="0"/>
+              <ma14:wrappingTextBoxFlag xmlns:ma14="http://schemas.microsoft.com/office/mac/drawingml/2011/main" xmlns="" val="0"/>
             </a:ext>
           </a:extLst>
         </p:spPr>
@@ -34089,7 +34254,7 @@
             <a:pPr algn="l"/>
             <a:fld id="{F7021451-1387-4CA6-816F-3879F97B5CBC}" type="slidenum">
               <a:rPr lang="en-US" b="0"/>
-              <a:t>31</a:t>
+              <a:t>32</a:t>
             </a:fld>
             <a:endParaRPr lang="en-US"/>
           </a:p>
@@ -34103,7 +34268,7 @@
 </p:sld>
 </file>
 
-<file path=ppt/slides/slide32.xml><?xml version="1.0" encoding="utf-8"?>
+<file path=ppt/slides/slide33.xml><?xml version="1.0" encoding="utf-8"?>
 <p:sld xmlns:a="http://schemas.openxmlformats.org/drawingml/2006/main" xmlns:r="http://schemas.openxmlformats.org/officeDocument/2006/relationships" xmlns:p="http://schemas.openxmlformats.org/presentationml/2006/main">
   <p:cSld name="Slide 12">
     <p:bg>
@@ -34854,7 +35019,7 @@
           </a:prstGeom>
           <a:extLst>
             <a:ext uri="{C572A759-6A51-4108-AA02-DFA0A04FC94B}">
-              <ma14:wrappingTextBoxFlag xmlns="" xmlns:ma14="http://schemas.microsoft.com/office/mac/drawingml/2011/main" val="0"/>
+              <ma14:wrappingTextBoxFlag xmlns:ma14="http://schemas.microsoft.com/office/mac/drawingml/2011/main" xmlns="" val="0"/>
             </a:ext>
           </a:extLst>
         </p:spPr>
@@ -34876,7 +35041,7 @@
             <a:pPr algn="l"/>
             <a:fld id="{F7021451-1387-4CA6-816F-3879F97B5CBC}" type="slidenum">
               <a:rPr lang="en-US" b="0"/>
-              <a:t>32</a:t>
+              <a:t>33</a:t>
             </a:fld>
             <a:endParaRPr lang="en-US"/>
           </a:p>
@@ -34890,7 +35055,7 @@
 </p:sld>
 </file>
 
-<file path=ppt/slides/slide33.xml><?xml version="1.0" encoding="utf-8"?>
+<file path=ppt/slides/slide34.xml><?xml version="1.0" encoding="utf-8"?>
 <p:sld xmlns:a="http://schemas.openxmlformats.org/drawingml/2006/main" xmlns:r="http://schemas.openxmlformats.org/officeDocument/2006/relationships" xmlns:p="http://schemas.openxmlformats.org/presentationml/2006/main">
   <p:cSld name="Slide 13">
     <p:bg>
@@ -35654,7 +35819,7 @@
           </a:prstGeom>
           <a:extLst>
             <a:ext uri="{C572A759-6A51-4108-AA02-DFA0A04FC94B}">
-              <ma14:wrappingTextBoxFlag xmlns="" xmlns:ma14="http://schemas.microsoft.com/office/mac/drawingml/2011/main" val="0"/>
+              <ma14:wrappingTextBoxFlag xmlns:ma14="http://schemas.microsoft.com/office/mac/drawingml/2011/main" xmlns="" val="0"/>
             </a:ext>
           </a:extLst>
         </p:spPr>
@@ -35676,7 +35841,7 @@
             <a:pPr algn="l"/>
             <a:fld id="{F7021451-1387-4CA6-816F-3879F97B5CBC}" type="slidenum">
               <a:rPr lang="en-US" b="0"/>
-              <a:t>33</a:t>
+              <a:t>34</a:t>
             </a:fld>
             <a:endParaRPr lang="en-US"/>
           </a:p>
@@ -35690,7 +35855,7 @@
 </p:sld>
 </file>
 
-<file path=ppt/slides/slide34.xml><?xml version="1.0" encoding="utf-8"?>
+<file path=ppt/slides/slide35.xml><?xml version="1.0" encoding="utf-8"?>
 <p:sld xmlns:a="http://schemas.openxmlformats.org/drawingml/2006/main" xmlns:r="http://schemas.openxmlformats.org/officeDocument/2006/relationships" xmlns:p="http://schemas.openxmlformats.org/presentationml/2006/main">
   <p:cSld name="Slide 14">
     <p:bg>
@@ -36116,7 +36281,7 @@
           </a:prstGeom>
           <a:extLst>
             <a:ext uri="{C572A759-6A51-4108-AA02-DFA0A04FC94B}">
-              <ma14:wrappingTextBoxFlag xmlns="" xmlns:ma14="http://schemas.microsoft.com/office/mac/drawingml/2011/main" val="0"/>
+              <ma14:wrappingTextBoxFlag xmlns:ma14="http://schemas.microsoft.com/office/mac/drawingml/2011/main" xmlns="" val="0"/>
             </a:ext>
           </a:extLst>
         </p:spPr>
@@ -36138,83 +36303,13 @@
             <a:pPr algn="l"/>
             <a:fld id="{F7021451-1387-4CA6-816F-3879F97B5CBC}" type="slidenum">
               <a:rPr lang="en-US" b="0"/>
-              <a:t>34</a:t>
+              <a:t>35</a:t>
             </a:fld>
             <a:endParaRPr lang="en-US"/>
           </a:p>
         </p:txBody>
       </p:sp>
     </p:spTree>
-  </p:cSld>
-  <p:clrMapOvr>
-    <a:masterClrMapping/>
-  </p:clrMapOvr>
-</p:sld>
-</file>
-
-<file path=ppt/slides/slide35.xml><?xml version="1.0" encoding="utf-8"?>
-<p:sld xmlns:a="http://schemas.openxmlformats.org/drawingml/2006/main" xmlns:r="http://schemas.openxmlformats.org/officeDocument/2006/relationships" xmlns:p="http://schemas.openxmlformats.org/presentationml/2006/main">
-  <p:cSld>
-    <p:spTree>
-      <p:nvGrpSpPr>
-        <p:cNvPr id="1" name=""/>
-        <p:cNvGrpSpPr/>
-        <p:nvPr/>
-      </p:nvGrpSpPr>
-      <p:grpSpPr>
-        <a:xfrm>
-          <a:off x="0" y="0"/>
-          <a:ext cx="0" cy="0"/>
-          <a:chOff x="0" y="0"/>
-          <a:chExt cx="0" cy="0"/>
-        </a:xfrm>
-      </p:grpSpPr>
-      <p:sp>
-        <p:nvSpPr>
-          <p:cNvPr id="2" name="TextBox 1">
-            <a:extLst>
-              <a:ext uri="{FF2B5EF4-FFF2-40B4-BE49-F238E27FC236}">
-                <a16:creationId xmlns:a16="http://schemas.microsoft.com/office/drawing/2014/main" id="{8C8156AC-8223-9AA1-ABAB-9A9687FE2C16}"/>
-              </a:ext>
-            </a:extLst>
-          </p:cNvPr>
-          <p:cNvSpPr txBox="1"/>
-          <p:nvPr/>
-        </p:nvSpPr>
-        <p:spPr>
-          <a:xfrm>
-            <a:off x="3727210" y="2563905"/>
-            <a:ext cx="4737579" cy="769441"/>
-          </a:xfrm>
-          <a:prstGeom prst="rect">
-            <a:avLst/>
-          </a:prstGeom>
-          <a:noFill/>
-        </p:spPr>
-        <p:txBody>
-          <a:bodyPr wrap="none" rtlCol="0">
-            <a:spAutoFit/>
-          </a:bodyPr>
-          <a:lstStyle/>
-          <a:p>
-            <a:pPr algn="ctr"/>
-            <a:r>
-              <a:rPr lang="en-US" sz="4400" dirty="0">
-                <a:solidFill>
-                  <a:schemeClr val="bg1"/>
-                </a:solidFill>
-              </a:rPr>
-              <a:t>Appendix Material</a:t>
-            </a:r>
-          </a:p>
-        </p:txBody>
-      </p:sp>
-    </p:spTree>
-    <p:extLst>
-      <p:ext uri="{BB962C8B-B14F-4D97-AF65-F5344CB8AC3E}">
-        <p14:creationId xmlns:p14="http://schemas.microsoft.com/office/powerpoint/2010/main" val="248784702"/>
-      </p:ext>
-    </p:extLst>
   </p:cSld>
   <p:clrMapOvr>
     <a:masterClrMapping/>
@@ -36241,10 +36336,10 @@
       </p:grpSpPr>
       <p:sp>
         <p:nvSpPr>
-          <p:cNvPr id="3" name="TextBox 2">
+          <p:cNvPr id="2" name="TextBox 1">
             <a:extLst>
               <a:ext uri="{FF2B5EF4-FFF2-40B4-BE49-F238E27FC236}">
-                <a16:creationId xmlns:a16="http://schemas.microsoft.com/office/drawing/2014/main" id="{40505B83-FABA-FFE5-68AF-BE1DB8239A67}"/>
+                <a16:creationId xmlns:a16="http://schemas.microsoft.com/office/drawing/2014/main" id="{8C8156AC-8223-9AA1-ABAB-9A9687FE2C16}"/>
               </a:ext>
             </a:extLst>
           </p:cNvPr>
@@ -36253,8 +36348,8 @@
         </p:nvSpPr>
         <p:spPr>
           <a:xfrm>
-            <a:off x="2594118" y="2563905"/>
-            <a:ext cx="7003777" cy="769441"/>
+            <a:off x="3727210" y="2563905"/>
+            <a:ext cx="4737579" cy="769441"/>
           </a:xfrm>
           <a:prstGeom prst="rect">
             <a:avLst/>
@@ -36274,7 +36369,7 @@
                   <a:schemeClr val="bg1"/>
                 </a:solidFill>
               </a:rPr>
-              <a:t>Architecture Flow Diagrams</a:t>
+              <a:t>Appendix Material</a:t>
             </a:r>
           </a:p>
         </p:txBody>
@@ -36282,7 +36377,7 @@
     </p:spTree>
     <p:extLst>
       <p:ext uri="{BB962C8B-B14F-4D97-AF65-F5344CB8AC3E}">
-        <p14:creationId xmlns:p14="http://schemas.microsoft.com/office/powerpoint/2010/main" val="1075774534"/>
+        <p14:creationId xmlns:p14="http://schemas.microsoft.com/office/powerpoint/2010/main" val="248784702"/>
       </p:ext>
     </p:extLst>
   </p:cSld>
@@ -36309,46 +36404,50 @@
           <a:chExt cx="0" cy="0"/>
         </a:xfrm>
       </p:grpSpPr>
-      <p:pic>
-        <p:nvPicPr>
-          <p:cNvPr id="3" name="Graphic 2">
+      <p:sp>
+        <p:nvSpPr>
+          <p:cNvPr id="3" name="TextBox 2">
             <a:extLst>
               <a:ext uri="{FF2B5EF4-FFF2-40B4-BE49-F238E27FC236}">
-                <a16:creationId xmlns:a16="http://schemas.microsoft.com/office/drawing/2014/main" id="{A32F4CC8-D3D6-738E-7824-DE62B6BB84FC}"/>
+                <a16:creationId xmlns:a16="http://schemas.microsoft.com/office/drawing/2014/main" id="{40505B83-FABA-FFE5-68AF-BE1DB8239A67}"/>
               </a:ext>
             </a:extLst>
           </p:cNvPr>
-          <p:cNvPicPr>
-            <a:picLocks noChangeAspect="1"/>
-          </p:cNvPicPr>
-          <p:nvPr/>
-        </p:nvPicPr>
-        <p:blipFill>
-          <a:blip>
-            <a:extLst>
-              <a:ext uri="{96DAC541-7B7A-43D3-8B79-37D633B846F1}">
-                <asvg:svgBlip xmlns:asvg="http://schemas.microsoft.com/office/drawing/2016/SVG/main" r:embed="rId2"/>
-              </a:ext>
-            </a:extLst>
-          </a:blip>
-          <a:stretch>
-            <a:fillRect/>
-          </a:stretch>
-        </p:blipFill>
-        <p:spPr>
-          <a:xfrm>
-            <a:off x="609600" y="137873"/>
-            <a:ext cx="10972800" cy="6858000"/>
+          <p:cNvSpPr txBox="1"/>
+          <p:nvPr/>
+        </p:nvSpPr>
+        <p:spPr>
+          <a:xfrm>
+            <a:off x="2594118" y="2563905"/>
+            <a:ext cx="7003777" cy="769441"/>
           </a:xfrm>
           <a:prstGeom prst="rect">
             <a:avLst/>
           </a:prstGeom>
-        </p:spPr>
-      </p:pic>
+          <a:noFill/>
+        </p:spPr>
+        <p:txBody>
+          <a:bodyPr wrap="none" rtlCol="0">
+            <a:spAutoFit/>
+          </a:bodyPr>
+          <a:lstStyle/>
+          <a:p>
+            <a:pPr algn="ctr"/>
+            <a:r>
+              <a:rPr lang="en-US" sz="4400" dirty="0">
+                <a:solidFill>
+                  <a:schemeClr val="bg1"/>
+                </a:solidFill>
+              </a:rPr>
+              <a:t>Architecture Flow Diagrams</a:t>
+            </a:r>
+          </a:p>
+        </p:txBody>
+      </p:sp>
     </p:spTree>
     <p:extLst>
       <p:ext uri="{BB962C8B-B14F-4D97-AF65-F5344CB8AC3E}">
-        <p14:creationId xmlns:p14="http://schemas.microsoft.com/office/powerpoint/2010/main" val="2314957383"/>
+        <p14:creationId xmlns:p14="http://schemas.microsoft.com/office/powerpoint/2010/main" val="1075774534"/>
       </p:ext>
     </p:extLst>
   </p:cSld>
@@ -36377,10 +36476,10 @@
       </p:grpSpPr>
       <p:pic>
         <p:nvPicPr>
-          <p:cNvPr id="4" name="Graphic 3">
+          <p:cNvPr id="3" name="Graphic 2">
             <a:extLst>
               <a:ext uri="{FF2B5EF4-FFF2-40B4-BE49-F238E27FC236}">
-                <a16:creationId xmlns:a16="http://schemas.microsoft.com/office/drawing/2014/main" id="{3C1CA9C8-F26D-AC50-DFE1-764F86FC03F8}"/>
+                <a16:creationId xmlns:a16="http://schemas.microsoft.com/office/drawing/2014/main" id="{A32F4CC8-D3D6-738E-7824-DE62B6BB84FC}"/>
               </a:ext>
             </a:extLst>
           </p:cNvPr>
@@ -36403,8 +36502,8 @@
         </p:blipFill>
         <p:spPr>
           <a:xfrm>
-            <a:off x="681789" y="0"/>
-            <a:ext cx="10828421" cy="6858000"/>
+            <a:off x="609600" y="137873"/>
+            <a:ext cx="10972800" cy="6858000"/>
           </a:xfrm>
           <a:prstGeom prst="rect">
             <a:avLst/>
@@ -36414,7 +36513,7 @@
     </p:spTree>
     <p:extLst>
       <p:ext uri="{BB962C8B-B14F-4D97-AF65-F5344CB8AC3E}">
-        <p14:creationId xmlns:p14="http://schemas.microsoft.com/office/powerpoint/2010/main" val="3069205590"/>
+        <p14:creationId xmlns:p14="http://schemas.microsoft.com/office/powerpoint/2010/main" val="2314957383"/>
       </p:ext>
     </p:extLst>
   </p:cSld>
@@ -36443,10 +36542,10 @@
       </p:grpSpPr>
       <p:pic>
         <p:nvPicPr>
-          <p:cNvPr id="6" name="Graphic 5">
+          <p:cNvPr id="4" name="Graphic 3">
             <a:extLst>
               <a:ext uri="{FF2B5EF4-FFF2-40B4-BE49-F238E27FC236}">
-                <a16:creationId xmlns:a16="http://schemas.microsoft.com/office/drawing/2014/main" id="{957F5EC3-C126-09B7-8657-447C304DE688}"/>
+                <a16:creationId xmlns:a16="http://schemas.microsoft.com/office/drawing/2014/main" id="{3C1CA9C8-F26D-AC50-DFE1-764F86FC03F8}"/>
               </a:ext>
             </a:extLst>
           </p:cNvPr>
@@ -36469,8 +36568,8 @@
         </p:blipFill>
         <p:spPr>
           <a:xfrm>
-            <a:off x="571500" y="0"/>
-            <a:ext cx="11049000" cy="6858000"/>
+            <a:off x="681789" y="0"/>
+            <a:ext cx="10828421" cy="6858000"/>
           </a:xfrm>
           <a:prstGeom prst="rect">
             <a:avLst/>
@@ -36480,7 +36579,7 @@
     </p:spTree>
     <p:extLst>
       <p:ext uri="{BB962C8B-B14F-4D97-AF65-F5344CB8AC3E}">
-        <p14:creationId xmlns:p14="http://schemas.microsoft.com/office/powerpoint/2010/main" val="836185984"/>
+        <p14:creationId xmlns:p14="http://schemas.microsoft.com/office/powerpoint/2010/main" val="3069205590"/>
       </p:ext>
     </p:extLst>
   </p:cSld>
@@ -36585,10 +36684,10 @@
       </p:grpSpPr>
       <p:pic>
         <p:nvPicPr>
-          <p:cNvPr id="3" name="Graphic 2">
+          <p:cNvPr id="6" name="Graphic 5">
             <a:extLst>
               <a:ext uri="{FF2B5EF4-FFF2-40B4-BE49-F238E27FC236}">
-                <a16:creationId xmlns:a16="http://schemas.microsoft.com/office/drawing/2014/main" id="{E25BF99C-49C9-29BD-EF7A-35B19BA09794}"/>
+                <a16:creationId xmlns:a16="http://schemas.microsoft.com/office/drawing/2014/main" id="{957F5EC3-C126-09B7-8657-447C304DE688}"/>
               </a:ext>
             </a:extLst>
           </p:cNvPr>
@@ -36611,8 +36710,8 @@
         </p:blipFill>
         <p:spPr>
           <a:xfrm>
-            <a:off x="1391460" y="365598"/>
-            <a:ext cx="8572500" cy="1905000"/>
+            <a:off x="571500" y="0"/>
+            <a:ext cx="11049000" cy="6858000"/>
           </a:xfrm>
           <a:prstGeom prst="rect">
             <a:avLst/>
@@ -36622,7 +36721,7 @@
     </p:spTree>
     <p:extLst>
       <p:ext uri="{BB962C8B-B14F-4D97-AF65-F5344CB8AC3E}">
-        <p14:creationId xmlns:p14="http://schemas.microsoft.com/office/powerpoint/2010/main" val="591707817"/>
+        <p14:creationId xmlns:p14="http://schemas.microsoft.com/office/powerpoint/2010/main" val="836185984"/>
       </p:ext>
     </p:extLst>
   </p:cSld>
@@ -36654,6 +36753,72 @@
           <p:cNvPr id="3" name="Graphic 2">
             <a:extLst>
               <a:ext uri="{FF2B5EF4-FFF2-40B4-BE49-F238E27FC236}">
+                <a16:creationId xmlns:a16="http://schemas.microsoft.com/office/drawing/2014/main" id="{E25BF99C-49C9-29BD-EF7A-35B19BA09794}"/>
+              </a:ext>
+            </a:extLst>
+          </p:cNvPr>
+          <p:cNvPicPr>
+            <a:picLocks noChangeAspect="1"/>
+          </p:cNvPicPr>
+          <p:nvPr/>
+        </p:nvPicPr>
+        <p:blipFill>
+          <a:blip>
+            <a:extLst>
+              <a:ext uri="{96DAC541-7B7A-43D3-8B79-37D633B846F1}">
+                <asvg:svgBlip xmlns:asvg="http://schemas.microsoft.com/office/drawing/2016/SVG/main" r:embed="rId2"/>
+              </a:ext>
+            </a:extLst>
+          </a:blip>
+          <a:stretch>
+            <a:fillRect/>
+          </a:stretch>
+        </p:blipFill>
+        <p:spPr>
+          <a:xfrm>
+            <a:off x="1391460" y="365598"/>
+            <a:ext cx="8572500" cy="1905000"/>
+          </a:xfrm>
+          <a:prstGeom prst="rect">
+            <a:avLst/>
+          </a:prstGeom>
+        </p:spPr>
+      </p:pic>
+    </p:spTree>
+    <p:extLst>
+      <p:ext uri="{BB962C8B-B14F-4D97-AF65-F5344CB8AC3E}">
+        <p14:creationId xmlns:p14="http://schemas.microsoft.com/office/powerpoint/2010/main" val="591707817"/>
+      </p:ext>
+    </p:extLst>
+  </p:cSld>
+  <p:clrMapOvr>
+    <a:masterClrMapping/>
+  </p:clrMapOvr>
+</p:sld>
+</file>
+
+<file path=ppt/slides/slide42.xml><?xml version="1.0" encoding="utf-8"?>
+<p:sld xmlns:a="http://schemas.openxmlformats.org/drawingml/2006/main" xmlns:r="http://schemas.openxmlformats.org/officeDocument/2006/relationships" xmlns:p="http://schemas.openxmlformats.org/presentationml/2006/main">
+  <p:cSld>
+    <p:spTree>
+      <p:nvGrpSpPr>
+        <p:cNvPr id="1" name=""/>
+        <p:cNvGrpSpPr/>
+        <p:nvPr/>
+      </p:nvGrpSpPr>
+      <p:grpSpPr>
+        <a:xfrm>
+          <a:off x="0" y="0"/>
+          <a:ext cx="0" cy="0"/>
+          <a:chOff x="0" y="0"/>
+          <a:chExt cx="0" cy="0"/>
+        </a:xfrm>
+      </p:grpSpPr>
+      <p:pic>
+        <p:nvPicPr>
+          <p:cNvPr id="3" name="Graphic 2">
+            <a:extLst>
+              <a:ext uri="{FF2B5EF4-FFF2-40B4-BE49-F238E27FC236}">
                 <a16:creationId xmlns:a16="http://schemas.microsoft.com/office/drawing/2014/main" id="{CB443F74-4D50-BC18-55E6-FD095FF7258D}"/>
               </a:ext>
             </a:extLst>
@@ -36698,7 +36863,7 @@
 </p:sld>
 </file>
 
-<file path=ppt/slides/slide42.xml><?xml version="1.0" encoding="utf-8"?>
+<file path=ppt/slides/slide43.xml><?xml version="1.0" encoding="utf-8"?>
 <p:sld xmlns:a="http://schemas.openxmlformats.org/drawingml/2006/main" xmlns:r="http://schemas.openxmlformats.org/officeDocument/2006/relationships" xmlns:p="http://schemas.openxmlformats.org/presentationml/2006/main">
   <p:cSld>
     <p:spTree>
@@ -43253,7 +43418,7 @@
 </p:sld>
 </file>
 
-<file path=ppt/slides/slide43.xml><?xml version="1.0" encoding="utf-8"?>
+<file path=ppt/slides/slide44.xml><?xml version="1.0" encoding="utf-8"?>
 <p:sld xmlns:a="http://schemas.openxmlformats.org/drawingml/2006/main" xmlns:r="http://schemas.openxmlformats.org/officeDocument/2006/relationships" xmlns:p="http://schemas.openxmlformats.org/presentationml/2006/main">
   <p:cSld>
     <p:spTree>
@@ -49331,7 +49496,7 @@
 </p:sld>
 </file>
 
-<file path=ppt/slides/slide44.xml><?xml version="1.0" encoding="utf-8"?>
+<file path=ppt/slides/slide45.xml><?xml version="1.0" encoding="utf-8"?>
 <p:sld xmlns:a="http://schemas.openxmlformats.org/drawingml/2006/main" xmlns:r="http://schemas.openxmlformats.org/officeDocument/2006/relationships" xmlns:p="http://schemas.openxmlformats.org/presentationml/2006/main">
   <p:cSld>
     <p:spTree>
